--- a/docs/pptx/entire/ritu-entire-linsubhr-sens-throm2.pptx
+++ b/docs/pptx/entire/ritu-entire-linsubhr-sens-throm2.pptx
@@ -3045,612 +3045,612 @@
           </p:nvSpPr>
           <p:spPr>
             <a:xfrm>
-              <a:off x="1172049" y="3441198"/>
-              <a:ext cx="7090630" cy="1878938"/>
+              <a:off x="1172049" y="3431944"/>
+              <a:ext cx="7090630" cy="1889571"/>
             </a:xfrm>
             <a:custGeom>
               <a:avLst/>
               <a:pathLst>
-                <a:path w="7090630" h="1878938">
+                <a:path w="7090630" h="1889571">
                   <a:moveTo>
                     <a:pt x="0" y="0"/>
                   </a:moveTo>
                   <a:lnTo>
-                    <a:pt x="71622" y="46270"/>
-                  </a:lnTo>
-                  <a:lnTo>
-                    <a:pt x="143245" y="91528"/>
-                  </a:lnTo>
-                  <a:lnTo>
-                    <a:pt x="214867" y="135796"/>
-                  </a:lnTo>
-                  <a:lnTo>
-                    <a:pt x="286490" y="179097"/>
-                  </a:lnTo>
-                  <a:lnTo>
-                    <a:pt x="358112" y="221451"/>
-                  </a:lnTo>
-                  <a:lnTo>
-                    <a:pt x="429735" y="262879"/>
-                  </a:lnTo>
-                  <a:lnTo>
-                    <a:pt x="501357" y="303400"/>
-                  </a:lnTo>
-                  <a:lnTo>
-                    <a:pt x="572980" y="343036"/>
-                  </a:lnTo>
-                  <a:lnTo>
-                    <a:pt x="644602" y="381805"/>
-                  </a:lnTo>
-                  <a:lnTo>
-                    <a:pt x="716225" y="419727"/>
-                  </a:lnTo>
-                  <a:lnTo>
-                    <a:pt x="787847" y="456819"/>
-                  </a:lnTo>
-                  <a:lnTo>
-                    <a:pt x="859470" y="493100"/>
-                  </a:lnTo>
-                  <a:lnTo>
-                    <a:pt x="931092" y="528588"/>
-                  </a:lnTo>
-                  <a:lnTo>
-                    <a:pt x="1002715" y="563299"/>
-                  </a:lnTo>
-                  <a:lnTo>
-                    <a:pt x="1074337" y="597252"/>
-                  </a:lnTo>
-                  <a:lnTo>
-                    <a:pt x="1145960" y="630463"/>
-                  </a:lnTo>
-                  <a:lnTo>
-                    <a:pt x="1217582" y="662947"/>
-                  </a:lnTo>
-                  <a:lnTo>
-                    <a:pt x="1289205" y="694721"/>
-                  </a:lnTo>
-                  <a:lnTo>
-                    <a:pt x="1360827" y="725800"/>
-                  </a:lnTo>
-                  <a:lnTo>
-                    <a:pt x="1432450" y="756199"/>
-                  </a:lnTo>
-                  <a:lnTo>
-                    <a:pt x="1504073" y="785934"/>
-                  </a:lnTo>
-                  <a:lnTo>
-                    <a:pt x="1575695" y="815019"/>
-                  </a:lnTo>
-                  <a:lnTo>
-                    <a:pt x="1647318" y="843467"/>
-                  </a:lnTo>
-                  <a:lnTo>
-                    <a:pt x="1718940" y="871294"/>
-                  </a:lnTo>
-                  <a:lnTo>
-                    <a:pt x="1790563" y="898512"/>
-                  </a:lnTo>
-                  <a:lnTo>
-                    <a:pt x="1862185" y="925135"/>
-                  </a:lnTo>
-                  <a:lnTo>
-                    <a:pt x="1933808" y="951176"/>
-                  </a:lnTo>
-                  <a:lnTo>
-                    <a:pt x="2005430" y="976647"/>
-                  </a:lnTo>
-                  <a:lnTo>
-                    <a:pt x="2077053" y="1001561"/>
-                  </a:lnTo>
-                  <a:lnTo>
-                    <a:pt x="2148675" y="1025931"/>
-                  </a:lnTo>
-                  <a:lnTo>
-                    <a:pt x="2220298" y="1049768"/>
-                  </a:lnTo>
-                  <a:lnTo>
-                    <a:pt x="2291920" y="1073083"/>
-                  </a:lnTo>
-                  <a:lnTo>
-                    <a:pt x="2363543" y="1095889"/>
-                  </a:lnTo>
-                  <a:lnTo>
-                    <a:pt x="2435165" y="1118196"/>
-                  </a:lnTo>
-                  <a:lnTo>
-                    <a:pt x="2506788" y="1140016"/>
-                  </a:lnTo>
-                  <a:lnTo>
-                    <a:pt x="2578410" y="1161358"/>
-                  </a:lnTo>
-                  <a:lnTo>
-                    <a:pt x="2650033" y="1182233"/>
-                  </a:lnTo>
-                  <a:lnTo>
-                    <a:pt x="2721655" y="1202652"/>
-                  </a:lnTo>
-                  <a:lnTo>
-                    <a:pt x="2793278" y="1222625"/>
-                  </a:lnTo>
-                  <a:lnTo>
-                    <a:pt x="2864901" y="1242161"/>
-                  </a:lnTo>
-                  <a:lnTo>
-                    <a:pt x="2936523" y="1261269"/>
-                  </a:lnTo>
-                  <a:lnTo>
-                    <a:pt x="3008146" y="1279960"/>
-                  </a:lnTo>
-                  <a:lnTo>
-                    <a:pt x="3079768" y="1288922"/>
-                  </a:lnTo>
-                  <a:lnTo>
-                    <a:pt x="3151391" y="1292556"/>
-                  </a:lnTo>
-                  <a:lnTo>
-                    <a:pt x="3223013" y="1296175"/>
-                  </a:lnTo>
-                  <a:lnTo>
-                    <a:pt x="3294636" y="1299777"/>
-                  </a:lnTo>
-                  <a:lnTo>
-                    <a:pt x="3366258" y="1303364"/>
-                  </a:lnTo>
-                  <a:lnTo>
-                    <a:pt x="3437881" y="1306935"/>
-                  </a:lnTo>
-                  <a:lnTo>
-                    <a:pt x="3509503" y="1310490"/>
-                  </a:lnTo>
-                  <a:lnTo>
-                    <a:pt x="3581126" y="1314029"/>
-                  </a:lnTo>
-                  <a:lnTo>
-                    <a:pt x="3652748" y="1317554"/>
-                  </a:lnTo>
-                  <a:lnTo>
-                    <a:pt x="3724371" y="1321062"/>
-                  </a:lnTo>
-                  <a:lnTo>
-                    <a:pt x="3795993" y="1324555"/>
-                  </a:lnTo>
-                  <a:lnTo>
-                    <a:pt x="3867616" y="1328033"/>
-                  </a:lnTo>
-                  <a:lnTo>
-                    <a:pt x="3939238" y="1331496"/>
-                  </a:lnTo>
-                  <a:lnTo>
-                    <a:pt x="4010861" y="1334943"/>
-                  </a:lnTo>
-                  <a:lnTo>
-                    <a:pt x="4082483" y="1338375"/>
-                  </a:lnTo>
-                  <a:lnTo>
-                    <a:pt x="4154106" y="1341792"/>
-                  </a:lnTo>
-                  <a:lnTo>
-                    <a:pt x="4225729" y="1345194"/>
-                  </a:lnTo>
-                  <a:lnTo>
-                    <a:pt x="4297351" y="1348581"/>
-                  </a:lnTo>
-                  <a:lnTo>
-                    <a:pt x="4368974" y="1351953"/>
-                  </a:lnTo>
-                  <a:lnTo>
-                    <a:pt x="4440596" y="1355311"/>
-                  </a:lnTo>
-                  <a:lnTo>
-                    <a:pt x="4512219" y="1358653"/>
-                  </a:lnTo>
-                  <a:lnTo>
-                    <a:pt x="4583841" y="1361981"/>
-                  </a:lnTo>
-                  <a:lnTo>
-                    <a:pt x="4655464" y="1365295"/>
-                  </a:lnTo>
-                  <a:lnTo>
-                    <a:pt x="4727086" y="1368594"/>
-                  </a:lnTo>
-                  <a:lnTo>
-                    <a:pt x="4798709" y="1371878"/>
-                  </a:lnTo>
-                  <a:lnTo>
-                    <a:pt x="4870331" y="1375148"/>
-                  </a:lnTo>
-                  <a:lnTo>
-                    <a:pt x="4941954" y="1378403"/>
-                  </a:lnTo>
-                  <a:lnTo>
-                    <a:pt x="5013576" y="1381644"/>
-                  </a:lnTo>
-                  <a:lnTo>
-                    <a:pt x="5085199" y="1384871"/>
-                  </a:lnTo>
-                  <a:lnTo>
-                    <a:pt x="5156821" y="1388084"/>
-                  </a:lnTo>
-                  <a:lnTo>
-                    <a:pt x="5228444" y="1391283"/>
-                  </a:lnTo>
-                  <a:lnTo>
-                    <a:pt x="5300066" y="1394467"/>
-                  </a:lnTo>
-                  <a:lnTo>
-                    <a:pt x="5371689" y="1397638"/>
-                  </a:lnTo>
-                  <a:lnTo>
-                    <a:pt x="5443311" y="1400795"/>
-                  </a:lnTo>
-                  <a:lnTo>
-                    <a:pt x="5514934" y="1403937"/>
-                  </a:lnTo>
-                  <a:lnTo>
-                    <a:pt x="5586557" y="1407066"/>
-                  </a:lnTo>
-                  <a:lnTo>
-                    <a:pt x="5658179" y="1410182"/>
-                  </a:lnTo>
-                  <a:lnTo>
-                    <a:pt x="5729802" y="1413283"/>
-                  </a:lnTo>
-                  <a:lnTo>
-                    <a:pt x="5801424" y="1416371"/>
-                  </a:lnTo>
-                  <a:lnTo>
-                    <a:pt x="5873047" y="1419445"/>
-                  </a:lnTo>
-                  <a:lnTo>
-                    <a:pt x="5944669" y="1422506"/>
-                  </a:lnTo>
-                  <a:lnTo>
-                    <a:pt x="6016292" y="1425554"/>
-                  </a:lnTo>
-                  <a:lnTo>
-                    <a:pt x="6087914" y="1428588"/>
-                  </a:lnTo>
-                  <a:lnTo>
-                    <a:pt x="6159537" y="1431608"/>
-                  </a:lnTo>
-                  <a:lnTo>
-                    <a:pt x="6231159" y="1434616"/>
-                  </a:lnTo>
-                  <a:lnTo>
-                    <a:pt x="6302782" y="1437610"/>
-                  </a:lnTo>
-                  <a:lnTo>
-                    <a:pt x="6374404" y="1440591"/>
-                  </a:lnTo>
-                  <a:lnTo>
-                    <a:pt x="6446027" y="1443559"/>
-                  </a:lnTo>
-                  <a:lnTo>
-                    <a:pt x="6517649" y="1446514"/>
-                  </a:lnTo>
-                  <a:lnTo>
-                    <a:pt x="6589272" y="1449456"/>
-                  </a:lnTo>
-                  <a:lnTo>
-                    <a:pt x="6660894" y="1452385"/>
-                  </a:lnTo>
-                  <a:lnTo>
-                    <a:pt x="6732517" y="1455301"/>
-                  </a:lnTo>
-                  <a:lnTo>
-                    <a:pt x="6804139" y="1458204"/>
-                  </a:lnTo>
-                  <a:lnTo>
-                    <a:pt x="6875762" y="1461095"/>
-                  </a:lnTo>
-                  <a:lnTo>
-                    <a:pt x="6947385" y="1463973"/>
-                  </a:lnTo>
-                  <a:lnTo>
-                    <a:pt x="7019007" y="1466838"/>
-                  </a:lnTo>
-                  <a:lnTo>
-                    <a:pt x="7090630" y="1469690"/>
-                  </a:lnTo>
-                  <a:lnTo>
-                    <a:pt x="7090630" y="1878938"/>
-                  </a:lnTo>
-                  <a:lnTo>
-                    <a:pt x="7019007" y="1873638"/>
-                  </a:lnTo>
-                  <a:lnTo>
-                    <a:pt x="6947385" y="1868218"/>
-                  </a:lnTo>
-                  <a:lnTo>
-                    <a:pt x="6875762" y="1862678"/>
-                  </a:lnTo>
-                  <a:lnTo>
-                    <a:pt x="6804139" y="1857014"/>
-                  </a:lnTo>
-                  <a:lnTo>
-                    <a:pt x="6732517" y="1851223"/>
-                  </a:lnTo>
-                  <a:lnTo>
-                    <a:pt x="6660894" y="1845303"/>
-                  </a:lnTo>
-                  <a:lnTo>
-                    <a:pt x="6589272" y="1839250"/>
-                  </a:lnTo>
-                  <a:lnTo>
-                    <a:pt x="6517649" y="1833063"/>
-                  </a:lnTo>
-                  <a:lnTo>
-                    <a:pt x="6446027" y="1826736"/>
-                  </a:lnTo>
-                  <a:lnTo>
-                    <a:pt x="6374404" y="1820269"/>
-                  </a:lnTo>
-                  <a:lnTo>
-                    <a:pt x="6302782" y="1813657"/>
-                  </a:lnTo>
-                  <a:lnTo>
-                    <a:pt x="6231159" y="1806896"/>
-                  </a:lnTo>
-                  <a:lnTo>
-                    <a:pt x="6159537" y="1799985"/>
-                  </a:lnTo>
-                  <a:lnTo>
-                    <a:pt x="6087914" y="1792920"/>
-                  </a:lnTo>
-                  <a:lnTo>
-                    <a:pt x="6016292" y="1785696"/>
-                  </a:lnTo>
-                  <a:lnTo>
-                    <a:pt x="5944669" y="1778311"/>
-                  </a:lnTo>
-                  <a:lnTo>
-                    <a:pt x="5873047" y="1770761"/>
-                  </a:lnTo>
-                  <a:lnTo>
-                    <a:pt x="5801424" y="1763042"/>
-                  </a:lnTo>
-                  <a:lnTo>
-                    <a:pt x="5729802" y="1755150"/>
-                  </a:lnTo>
-                  <a:lnTo>
-                    <a:pt x="5658179" y="1747082"/>
-                  </a:lnTo>
-                  <a:lnTo>
-                    <a:pt x="5586557" y="1738834"/>
-                  </a:lnTo>
-                  <a:lnTo>
-                    <a:pt x="5514934" y="1730401"/>
-                  </a:lnTo>
-                  <a:lnTo>
-                    <a:pt x="5443311" y="1721780"/>
-                  </a:lnTo>
-                  <a:lnTo>
-                    <a:pt x="5371689" y="1712966"/>
-                  </a:lnTo>
-                  <a:lnTo>
-                    <a:pt x="5300066" y="1703955"/>
-                  </a:lnTo>
-                  <a:lnTo>
-                    <a:pt x="5228444" y="1694743"/>
-                  </a:lnTo>
-                  <a:lnTo>
-                    <a:pt x="5156821" y="1685325"/>
-                  </a:lnTo>
-                  <a:lnTo>
-                    <a:pt x="5085199" y="1675696"/>
-                  </a:lnTo>
-                  <a:lnTo>
-                    <a:pt x="5013576" y="1665852"/>
-                  </a:lnTo>
-                  <a:lnTo>
-                    <a:pt x="4941954" y="1655787"/>
-                  </a:lnTo>
-                  <a:lnTo>
-                    <a:pt x="4870331" y="1645498"/>
-                  </a:lnTo>
-                  <a:lnTo>
-                    <a:pt x="4798709" y="1634979"/>
-                  </a:lnTo>
-                  <a:lnTo>
-                    <a:pt x="4727086" y="1624225"/>
-                  </a:lnTo>
-                  <a:lnTo>
-                    <a:pt x="4655464" y="1613230"/>
-                  </a:lnTo>
-                  <a:lnTo>
-                    <a:pt x="4583841" y="1601989"/>
-                  </a:lnTo>
-                  <a:lnTo>
-                    <a:pt x="4512219" y="1590497"/>
-                  </a:lnTo>
-                  <a:lnTo>
-                    <a:pt x="4440596" y="1578749"/>
-                  </a:lnTo>
-                  <a:lnTo>
-                    <a:pt x="4368974" y="1566737"/>
-                  </a:lnTo>
-                  <a:lnTo>
-                    <a:pt x="4297351" y="1554457"/>
-                  </a:lnTo>
-                  <a:lnTo>
-                    <a:pt x="4225729" y="1541903"/>
-                  </a:lnTo>
-                  <a:lnTo>
-                    <a:pt x="4154106" y="1529068"/>
-                  </a:lnTo>
-                  <a:lnTo>
-                    <a:pt x="4082483" y="1515946"/>
-                  </a:lnTo>
-                  <a:lnTo>
-                    <a:pt x="4010861" y="1502530"/>
-                  </a:lnTo>
-                  <a:lnTo>
-                    <a:pt x="3939238" y="1488815"/>
-                  </a:lnTo>
-                  <a:lnTo>
-                    <a:pt x="3867616" y="1474793"/>
-                  </a:lnTo>
-                  <a:lnTo>
-                    <a:pt x="3795993" y="1460458"/>
-                  </a:lnTo>
-                  <a:lnTo>
-                    <a:pt x="3724371" y="1445802"/>
-                  </a:lnTo>
-                  <a:lnTo>
-                    <a:pt x="3652748" y="1430819"/>
-                  </a:lnTo>
-                  <a:lnTo>
-                    <a:pt x="3581126" y="1415500"/>
-                  </a:lnTo>
-                  <a:lnTo>
-                    <a:pt x="3509503" y="1399839"/>
-                  </a:lnTo>
-                  <a:lnTo>
-                    <a:pt x="3437881" y="1383828"/>
-                  </a:lnTo>
-                  <a:lnTo>
-                    <a:pt x="3366258" y="1367460"/>
-                  </a:lnTo>
-                  <a:lnTo>
-                    <a:pt x="3294636" y="1350725"/>
-                  </a:lnTo>
-                  <a:lnTo>
-                    <a:pt x="3223013" y="1333616"/>
-                  </a:lnTo>
-                  <a:lnTo>
-                    <a:pt x="3151391" y="1316125"/>
-                  </a:lnTo>
-                  <a:lnTo>
-                    <a:pt x="3079768" y="1298242"/>
-                  </a:lnTo>
-                  <a:lnTo>
-                    <a:pt x="3008146" y="1285271"/>
-                  </a:lnTo>
-                  <a:lnTo>
-                    <a:pt x="2936523" y="1281605"/>
-                  </a:lnTo>
-                  <a:lnTo>
-                    <a:pt x="2864901" y="1277922"/>
-                  </a:lnTo>
-                  <a:lnTo>
-                    <a:pt x="2793278" y="1274223"/>
-                  </a:lnTo>
-                  <a:lnTo>
-                    <a:pt x="2721655" y="1270508"/>
-                  </a:lnTo>
-                  <a:lnTo>
-                    <a:pt x="2650033" y="1266776"/>
-                  </a:lnTo>
-                  <a:lnTo>
-                    <a:pt x="2578410" y="1263028"/>
-                  </a:lnTo>
-                  <a:lnTo>
-                    <a:pt x="2506788" y="1259264"/>
-                  </a:lnTo>
-                  <a:lnTo>
-                    <a:pt x="2435165" y="1255482"/>
-                  </a:lnTo>
-                  <a:lnTo>
-                    <a:pt x="2363543" y="1251684"/>
-                  </a:lnTo>
-                  <a:lnTo>
-                    <a:pt x="2291920" y="1247870"/>
-                  </a:lnTo>
-                  <a:lnTo>
-                    <a:pt x="2220298" y="1244038"/>
-                  </a:lnTo>
-                  <a:lnTo>
-                    <a:pt x="2148675" y="1240189"/>
-                  </a:lnTo>
-                  <a:lnTo>
-                    <a:pt x="2077053" y="1236324"/>
-                  </a:lnTo>
-                  <a:lnTo>
-                    <a:pt x="2005430" y="1232441"/>
-                  </a:lnTo>
-                  <a:lnTo>
-                    <a:pt x="1933808" y="1228542"/>
-                  </a:lnTo>
-                  <a:lnTo>
-                    <a:pt x="1862185" y="1224625"/>
-                  </a:lnTo>
-                  <a:lnTo>
-                    <a:pt x="1790563" y="1220691"/>
-                  </a:lnTo>
-                  <a:lnTo>
-                    <a:pt x="1718940" y="1216739"/>
-                  </a:lnTo>
-                  <a:lnTo>
-                    <a:pt x="1647318" y="1212770"/>
-                  </a:lnTo>
-                  <a:lnTo>
-                    <a:pt x="1575695" y="1208784"/>
-                  </a:lnTo>
-                  <a:lnTo>
-                    <a:pt x="1504073" y="1204780"/>
-                  </a:lnTo>
-                  <a:lnTo>
-                    <a:pt x="1432450" y="1200758"/>
-                  </a:lnTo>
-                  <a:lnTo>
-                    <a:pt x="1360827" y="1196718"/>
-                  </a:lnTo>
-                  <a:lnTo>
-                    <a:pt x="1289205" y="1192661"/>
-                  </a:lnTo>
-                  <a:lnTo>
-                    <a:pt x="1217582" y="1188586"/>
-                  </a:lnTo>
-                  <a:lnTo>
-                    <a:pt x="1145960" y="1184493"/>
-                  </a:lnTo>
-                  <a:lnTo>
-                    <a:pt x="1074337" y="1180381"/>
-                  </a:lnTo>
-                  <a:lnTo>
-                    <a:pt x="1002715" y="1176252"/>
-                  </a:lnTo>
-                  <a:lnTo>
-                    <a:pt x="931092" y="1172104"/>
-                  </a:lnTo>
-                  <a:lnTo>
-                    <a:pt x="859470" y="1167938"/>
-                  </a:lnTo>
-                  <a:lnTo>
-                    <a:pt x="787847" y="1163754"/>
-                  </a:lnTo>
-                  <a:lnTo>
-                    <a:pt x="716225" y="1159551"/>
-                  </a:lnTo>
-                  <a:lnTo>
-                    <a:pt x="644602" y="1155330"/>
-                  </a:lnTo>
-                  <a:lnTo>
-                    <a:pt x="572980" y="1151090"/>
-                  </a:lnTo>
-                  <a:lnTo>
-                    <a:pt x="501357" y="1146831"/>
-                  </a:lnTo>
-                  <a:lnTo>
-                    <a:pt x="429735" y="1142554"/>
-                  </a:lnTo>
-                  <a:lnTo>
-                    <a:pt x="358112" y="1138257"/>
-                  </a:lnTo>
-                  <a:lnTo>
-                    <a:pt x="286490" y="1133942"/>
-                  </a:lnTo>
-                  <a:lnTo>
-                    <a:pt x="214867" y="1129608"/>
-                  </a:lnTo>
-                  <a:lnTo>
-                    <a:pt x="143245" y="1125254"/>
-                  </a:lnTo>
-                  <a:lnTo>
-                    <a:pt x="71622" y="1120881"/>
-                  </a:lnTo>
-                  <a:lnTo>
-                    <a:pt x="0" y="1116489"/>
+                    <a:pt x="71622" y="46686"/>
+                  </a:lnTo>
+                  <a:lnTo>
+                    <a:pt x="143245" y="92347"/>
+                  </a:lnTo>
+                  <a:lnTo>
+                    <a:pt x="214867" y="137005"/>
+                  </a:lnTo>
+                  <a:lnTo>
+                    <a:pt x="286490" y="180682"/>
+                  </a:lnTo>
+                  <a:lnTo>
+                    <a:pt x="358112" y="223399"/>
+                  </a:lnTo>
+                  <a:lnTo>
+                    <a:pt x="429735" y="265178"/>
+                  </a:lnTo>
+                  <a:lnTo>
+                    <a:pt x="501357" y="306040"/>
+                  </a:lnTo>
+                  <a:lnTo>
+                    <a:pt x="572980" y="346003"/>
+                  </a:lnTo>
+                  <a:lnTo>
+                    <a:pt x="644602" y="385089"/>
+                  </a:lnTo>
+                  <a:lnTo>
+                    <a:pt x="716225" y="423316"/>
+                  </a:lnTo>
+                  <a:lnTo>
+                    <a:pt x="787847" y="460704"/>
+                  </a:lnTo>
+                  <a:lnTo>
+                    <a:pt x="859470" y="497270"/>
+                  </a:lnTo>
+                  <a:lnTo>
+                    <a:pt x="931092" y="533033"/>
+                  </a:lnTo>
+                  <a:lnTo>
+                    <a:pt x="1002715" y="568010"/>
+                  </a:lnTo>
+                  <a:lnTo>
+                    <a:pt x="1074337" y="602219"/>
+                  </a:lnTo>
+                  <a:lnTo>
+                    <a:pt x="1145960" y="635677"/>
+                  </a:lnTo>
+                  <a:lnTo>
+                    <a:pt x="1217582" y="668399"/>
+                  </a:lnTo>
+                  <a:lnTo>
+                    <a:pt x="1289205" y="700403"/>
+                  </a:lnTo>
+                  <a:lnTo>
+                    <a:pt x="1360827" y="731704"/>
+                  </a:lnTo>
+                  <a:lnTo>
+                    <a:pt x="1432450" y="762317"/>
+                  </a:lnTo>
+                  <a:lnTo>
+                    <a:pt x="1504073" y="792258"/>
+                  </a:lnTo>
+                  <a:lnTo>
+                    <a:pt x="1575695" y="821541"/>
+                  </a:lnTo>
+                  <a:lnTo>
+                    <a:pt x="1647318" y="850181"/>
+                  </a:lnTo>
+                  <a:lnTo>
+                    <a:pt x="1718940" y="878191"/>
+                  </a:lnTo>
+                  <a:lnTo>
+                    <a:pt x="1790563" y="905586"/>
+                  </a:lnTo>
+                  <a:lnTo>
+                    <a:pt x="1862185" y="932380"/>
+                  </a:lnTo>
+                  <a:lnTo>
+                    <a:pt x="1933808" y="958585"/>
+                  </a:lnTo>
+                  <a:lnTo>
+                    <a:pt x="2005430" y="984214"/>
+                  </a:lnTo>
+                  <a:lnTo>
+                    <a:pt x="2077053" y="1009280"/>
+                  </a:lnTo>
+                  <a:lnTo>
+                    <a:pt x="2148675" y="1033796"/>
+                  </a:lnTo>
+                  <a:lnTo>
+                    <a:pt x="2220298" y="1057773"/>
+                  </a:lnTo>
+                  <a:lnTo>
+                    <a:pt x="2291920" y="1081224"/>
+                  </a:lnTo>
+                  <a:lnTo>
+                    <a:pt x="2363543" y="1104159"/>
+                  </a:lnTo>
+                  <a:lnTo>
+                    <a:pt x="2435165" y="1126590"/>
+                  </a:lnTo>
+                  <a:lnTo>
+                    <a:pt x="2506788" y="1148529"/>
+                  </a:lnTo>
+                  <a:lnTo>
+                    <a:pt x="2578410" y="1169986"/>
+                  </a:lnTo>
+                  <a:lnTo>
+                    <a:pt x="2650033" y="1190971"/>
+                  </a:lnTo>
+                  <a:lnTo>
+                    <a:pt x="2721655" y="1211496"/>
+                  </a:lnTo>
+                  <a:lnTo>
+                    <a:pt x="2793278" y="1231569"/>
+                  </a:lnTo>
+                  <a:lnTo>
+                    <a:pt x="2864901" y="1251202"/>
+                  </a:lnTo>
+                  <a:lnTo>
+                    <a:pt x="2936523" y="1270403"/>
+                  </a:lnTo>
+                  <a:lnTo>
+                    <a:pt x="3008146" y="1289183"/>
+                  </a:lnTo>
+                  <a:lnTo>
+                    <a:pt x="3079768" y="1298232"/>
+                  </a:lnTo>
+                  <a:lnTo>
+                    <a:pt x="3151391" y="1301954"/>
+                  </a:lnTo>
+                  <a:lnTo>
+                    <a:pt x="3223013" y="1305658"/>
+                  </a:lnTo>
+                  <a:lnTo>
+                    <a:pt x="3294636" y="1309347"/>
+                  </a:lnTo>
+                  <a:lnTo>
+                    <a:pt x="3366258" y="1313018"/>
+                  </a:lnTo>
+                  <a:lnTo>
+                    <a:pt x="3437881" y="1316673"/>
+                  </a:lnTo>
+                  <a:lnTo>
+                    <a:pt x="3509503" y="1320312"/>
+                  </a:lnTo>
+                  <a:lnTo>
+                    <a:pt x="3581126" y="1323934"/>
+                  </a:lnTo>
+                  <a:lnTo>
+                    <a:pt x="3652748" y="1327540"/>
+                  </a:lnTo>
+                  <a:lnTo>
+                    <a:pt x="3724371" y="1331130"/>
+                  </a:lnTo>
+                  <a:lnTo>
+                    <a:pt x="3795993" y="1334703"/>
+                  </a:lnTo>
+                  <a:lnTo>
+                    <a:pt x="3867616" y="1338261"/>
+                  </a:lnTo>
+                  <a:lnTo>
+                    <a:pt x="3939238" y="1341802"/>
+                  </a:lnTo>
+                  <a:lnTo>
+                    <a:pt x="4010861" y="1345328"/>
+                  </a:lnTo>
+                  <a:lnTo>
+                    <a:pt x="4082483" y="1348838"/>
+                  </a:lnTo>
+                  <a:lnTo>
+                    <a:pt x="4154106" y="1352332"/>
+                  </a:lnTo>
+                  <a:lnTo>
+                    <a:pt x="4225729" y="1355810"/>
+                  </a:lnTo>
+                  <a:lnTo>
+                    <a:pt x="4297351" y="1359272"/>
+                  </a:lnTo>
+                  <a:lnTo>
+                    <a:pt x="4368974" y="1362719"/>
+                  </a:lnTo>
+                  <a:lnTo>
+                    <a:pt x="4440596" y="1366151"/>
+                  </a:lnTo>
+                  <a:lnTo>
+                    <a:pt x="4512219" y="1369567"/>
+                  </a:lnTo>
+                  <a:lnTo>
+                    <a:pt x="4583841" y="1372967"/>
+                  </a:lnTo>
+                  <a:lnTo>
+                    <a:pt x="4655464" y="1376353"/>
+                  </a:lnTo>
+                  <a:lnTo>
+                    <a:pt x="4727086" y="1379723"/>
+                  </a:lnTo>
+                  <a:lnTo>
+                    <a:pt x="4798709" y="1383078"/>
+                  </a:lnTo>
+                  <a:lnTo>
+                    <a:pt x="4870331" y="1386418"/>
+                  </a:lnTo>
+                  <a:lnTo>
+                    <a:pt x="4941954" y="1389742"/>
+                  </a:lnTo>
+                  <a:lnTo>
+                    <a:pt x="5013576" y="1393052"/>
+                  </a:lnTo>
+                  <a:lnTo>
+                    <a:pt x="5085199" y="1396347"/>
+                  </a:lnTo>
+                  <a:lnTo>
+                    <a:pt x="5156821" y="1399627"/>
+                  </a:lnTo>
+                  <a:lnTo>
+                    <a:pt x="5228444" y="1402893"/>
+                  </a:lnTo>
+                  <a:lnTo>
+                    <a:pt x="5300066" y="1406143"/>
+                  </a:lnTo>
+                  <a:lnTo>
+                    <a:pt x="5371689" y="1409379"/>
+                  </a:lnTo>
+                  <a:lnTo>
+                    <a:pt x="5443311" y="1412601"/>
+                  </a:lnTo>
+                  <a:lnTo>
+                    <a:pt x="5514934" y="1415808"/>
+                  </a:lnTo>
+                  <a:lnTo>
+                    <a:pt x="5586557" y="1419000"/>
+                  </a:lnTo>
+                  <a:lnTo>
+                    <a:pt x="5658179" y="1422179"/>
+                  </a:lnTo>
+                  <a:lnTo>
+                    <a:pt x="5729802" y="1425343"/>
+                  </a:lnTo>
+                  <a:lnTo>
+                    <a:pt x="5801424" y="1428492"/>
+                  </a:lnTo>
+                  <a:lnTo>
+                    <a:pt x="5873047" y="1431628"/>
+                  </a:lnTo>
+                  <a:lnTo>
+                    <a:pt x="5944669" y="1434749"/>
+                  </a:lnTo>
+                  <a:lnTo>
+                    <a:pt x="6016292" y="1437856"/>
+                  </a:lnTo>
+                  <a:lnTo>
+                    <a:pt x="6087914" y="1440950"/>
+                  </a:lnTo>
+                  <a:lnTo>
+                    <a:pt x="6159537" y="1444029"/>
+                  </a:lnTo>
+                  <a:lnTo>
+                    <a:pt x="6231159" y="1447095"/>
+                  </a:lnTo>
+                  <a:lnTo>
+                    <a:pt x="6302782" y="1450147"/>
+                  </a:lnTo>
+                  <a:lnTo>
+                    <a:pt x="6374404" y="1453185"/>
+                  </a:lnTo>
+                  <a:lnTo>
+                    <a:pt x="6446027" y="1456209"/>
+                  </a:lnTo>
+                  <a:lnTo>
+                    <a:pt x="6517649" y="1459220"/>
+                  </a:lnTo>
+                  <a:lnTo>
+                    <a:pt x="6589272" y="1462217"/>
+                  </a:lnTo>
+                  <a:lnTo>
+                    <a:pt x="6660894" y="1465201"/>
+                  </a:lnTo>
+                  <a:lnTo>
+                    <a:pt x="6732517" y="1468171"/>
+                  </a:lnTo>
+                  <a:lnTo>
+                    <a:pt x="6804139" y="1471128"/>
+                  </a:lnTo>
+                  <a:lnTo>
+                    <a:pt x="6875762" y="1474072"/>
+                  </a:lnTo>
+                  <a:lnTo>
+                    <a:pt x="6947385" y="1477002"/>
+                  </a:lnTo>
+                  <a:lnTo>
+                    <a:pt x="7019007" y="1479919"/>
+                  </a:lnTo>
+                  <a:lnTo>
+                    <a:pt x="7090630" y="1482823"/>
+                  </a:lnTo>
+                  <a:lnTo>
+                    <a:pt x="7090630" y="1889571"/>
+                  </a:lnTo>
+                  <a:lnTo>
+                    <a:pt x="7019007" y="1884277"/>
+                  </a:lnTo>
+                  <a:lnTo>
+                    <a:pt x="6947385" y="1878863"/>
+                  </a:lnTo>
+                  <a:lnTo>
+                    <a:pt x="6875762" y="1873328"/>
+                  </a:lnTo>
+                  <a:lnTo>
+                    <a:pt x="6804139" y="1867669"/>
+                  </a:lnTo>
+                  <a:lnTo>
+                    <a:pt x="6732517" y="1861882"/>
+                  </a:lnTo>
+                  <a:lnTo>
+                    <a:pt x="6660894" y="1855965"/>
+                  </a:lnTo>
+                  <a:lnTo>
+                    <a:pt x="6589272" y="1849916"/>
+                  </a:lnTo>
+                  <a:lnTo>
+                    <a:pt x="6517649" y="1843731"/>
+                  </a:lnTo>
+                  <a:lnTo>
+                    <a:pt x="6446027" y="1837406"/>
+                  </a:lnTo>
+                  <a:lnTo>
+                    <a:pt x="6374404" y="1830940"/>
+                  </a:lnTo>
+                  <a:lnTo>
+                    <a:pt x="6302782" y="1824329"/>
+                  </a:lnTo>
+                  <a:lnTo>
+                    <a:pt x="6231159" y="1817569"/>
+                  </a:lnTo>
+                  <a:lnTo>
+                    <a:pt x="6159537" y="1810657"/>
+                  </a:lnTo>
+                  <a:lnTo>
+                    <a:pt x="6087914" y="1803590"/>
+                  </a:lnTo>
+                  <a:lnTo>
+                    <a:pt x="6016292" y="1796364"/>
+                  </a:lnTo>
+                  <a:lnTo>
+                    <a:pt x="5944669" y="1788976"/>
+                  </a:lnTo>
+                  <a:lnTo>
+                    <a:pt x="5873047" y="1781422"/>
+                  </a:lnTo>
+                  <a:lnTo>
+                    <a:pt x="5801424" y="1773698"/>
+                  </a:lnTo>
+                  <a:lnTo>
+                    <a:pt x="5729802" y="1765801"/>
+                  </a:lnTo>
+                  <a:lnTo>
+                    <a:pt x="5658179" y="1757726"/>
+                  </a:lnTo>
+                  <a:lnTo>
+                    <a:pt x="5586557" y="1749470"/>
+                  </a:lnTo>
+                  <a:lnTo>
+                    <a:pt x="5514934" y="1741029"/>
+                  </a:lnTo>
+                  <a:lnTo>
+                    <a:pt x="5443311" y="1732398"/>
+                  </a:lnTo>
+                  <a:lnTo>
+                    <a:pt x="5371689" y="1723573"/>
+                  </a:lnTo>
+                  <a:lnTo>
+                    <a:pt x="5300066" y="1714550"/>
+                  </a:lnTo>
+                  <a:lnTo>
+                    <a:pt x="5228444" y="1705324"/>
+                  </a:lnTo>
+                  <a:lnTo>
+                    <a:pt x="5156821" y="1695891"/>
+                  </a:lnTo>
+                  <a:lnTo>
+                    <a:pt x="5085199" y="1686247"/>
+                  </a:lnTo>
+                  <a:lnTo>
+                    <a:pt x="5013576" y="1676385"/>
+                  </a:lnTo>
+                  <a:lnTo>
+                    <a:pt x="4941954" y="1666302"/>
+                  </a:lnTo>
+                  <a:lnTo>
+                    <a:pt x="4870331" y="1655993"/>
+                  </a:lnTo>
+                  <a:lnTo>
+                    <a:pt x="4798709" y="1645452"/>
+                  </a:lnTo>
+                  <a:lnTo>
+                    <a:pt x="4727086" y="1634675"/>
+                  </a:lnTo>
+                  <a:lnTo>
+                    <a:pt x="4655464" y="1623655"/>
+                  </a:lnTo>
+                  <a:lnTo>
+                    <a:pt x="4583841" y="1612388"/>
+                  </a:lnTo>
+                  <a:lnTo>
+                    <a:pt x="4512219" y="1600867"/>
+                  </a:lnTo>
+                  <a:lnTo>
+                    <a:pt x="4440596" y="1589088"/>
+                  </a:lnTo>
+                  <a:lnTo>
+                    <a:pt x="4368974" y="1577045"/>
+                  </a:lnTo>
+                  <a:lnTo>
+                    <a:pt x="4297351" y="1564731"/>
+                  </a:lnTo>
+                  <a:lnTo>
+                    <a:pt x="4225729" y="1552140"/>
+                  </a:lnTo>
+                  <a:lnTo>
+                    <a:pt x="4154106" y="1539266"/>
+                  </a:lnTo>
+                  <a:lnTo>
+                    <a:pt x="4082483" y="1526104"/>
+                  </a:lnTo>
+                  <a:lnTo>
+                    <a:pt x="4010861" y="1512645"/>
+                  </a:lnTo>
+                  <a:lnTo>
+                    <a:pt x="3939238" y="1498885"/>
+                  </a:lnTo>
+                  <a:lnTo>
+                    <a:pt x="3867616" y="1484815"/>
+                  </a:lnTo>
+                  <a:lnTo>
+                    <a:pt x="3795993" y="1470430"/>
+                  </a:lnTo>
+                  <a:lnTo>
+                    <a:pt x="3724371" y="1455721"/>
+                  </a:lnTo>
+                  <a:lnTo>
+                    <a:pt x="3652748" y="1440682"/>
+                  </a:lnTo>
+                  <a:lnTo>
+                    <a:pt x="3581126" y="1425305"/>
+                  </a:lnTo>
+                  <a:lnTo>
+                    <a:pt x="3509503" y="1409583"/>
+                  </a:lnTo>
+                  <a:lnTo>
+                    <a:pt x="3437881" y="1393508"/>
+                  </a:lnTo>
+                  <a:lnTo>
+                    <a:pt x="3366258" y="1377071"/>
+                  </a:lnTo>
+                  <a:lnTo>
+                    <a:pt x="3294636" y="1360266"/>
+                  </a:lnTo>
+                  <a:lnTo>
+                    <a:pt x="3223013" y="1343083"/>
+                  </a:lnTo>
+                  <a:lnTo>
+                    <a:pt x="3151391" y="1325514"/>
+                  </a:lnTo>
+                  <a:lnTo>
+                    <a:pt x="3079768" y="1307550"/>
+                  </a:lnTo>
+                  <a:lnTo>
+                    <a:pt x="3008146" y="1294493"/>
+                  </a:lnTo>
+                  <a:lnTo>
+                    <a:pt x="2936523" y="1290738"/>
+                  </a:lnTo>
+                  <a:lnTo>
+                    <a:pt x="2864901" y="1286966"/>
+                  </a:lnTo>
+                  <a:lnTo>
+                    <a:pt x="2793278" y="1283176"/>
+                  </a:lnTo>
+                  <a:lnTo>
+                    <a:pt x="2721655" y="1279370"/>
+                  </a:lnTo>
+                  <a:lnTo>
+                    <a:pt x="2650033" y="1275546"/>
+                  </a:lnTo>
+                  <a:lnTo>
+                    <a:pt x="2578410" y="1271705"/>
+                  </a:lnTo>
+                  <a:lnTo>
+                    <a:pt x="2506788" y="1267847"/>
+                  </a:lnTo>
+                  <a:lnTo>
+                    <a:pt x="2435165" y="1263971"/>
+                  </a:lnTo>
+                  <a:lnTo>
+                    <a:pt x="2363543" y="1260078"/>
+                  </a:lnTo>
+                  <a:lnTo>
+                    <a:pt x="2291920" y="1256167"/>
+                  </a:lnTo>
+                  <a:lnTo>
+                    <a:pt x="2220298" y="1252238"/>
+                  </a:lnTo>
+                  <a:lnTo>
+                    <a:pt x="2148675" y="1248292"/>
+                  </a:lnTo>
+                  <a:lnTo>
+                    <a:pt x="2077053" y="1244328"/>
+                  </a:lnTo>
+                  <a:lnTo>
+                    <a:pt x="2005430" y="1240346"/>
+                  </a:lnTo>
+                  <a:lnTo>
+                    <a:pt x="1933808" y="1236346"/>
+                  </a:lnTo>
+                  <a:lnTo>
+                    <a:pt x="1862185" y="1232327"/>
+                  </a:lnTo>
+                  <a:lnTo>
+                    <a:pt x="1790563" y="1228291"/>
+                  </a:lnTo>
+                  <a:lnTo>
+                    <a:pt x="1718940" y="1224237"/>
+                  </a:lnTo>
+                  <a:lnTo>
+                    <a:pt x="1647318" y="1220164"/>
+                  </a:lnTo>
+                  <a:lnTo>
+                    <a:pt x="1575695" y="1216072"/>
+                  </a:lnTo>
+                  <a:lnTo>
+                    <a:pt x="1504073" y="1211962"/>
+                  </a:lnTo>
+                  <a:lnTo>
+                    <a:pt x="1432450" y="1207834"/>
+                  </a:lnTo>
+                  <a:lnTo>
+                    <a:pt x="1360827" y="1203687"/>
+                  </a:lnTo>
+                  <a:lnTo>
+                    <a:pt x="1289205" y="1199521"/>
+                  </a:lnTo>
+                  <a:lnTo>
+                    <a:pt x="1217582" y="1195337"/>
+                  </a:lnTo>
+                  <a:lnTo>
+                    <a:pt x="1145960" y="1191133"/>
+                  </a:lnTo>
+                  <a:lnTo>
+                    <a:pt x="1074337" y="1186911"/>
+                  </a:lnTo>
+                  <a:lnTo>
+                    <a:pt x="1002715" y="1182669"/>
+                  </a:lnTo>
+                  <a:lnTo>
+                    <a:pt x="931092" y="1178408"/>
+                  </a:lnTo>
+                  <a:lnTo>
+                    <a:pt x="859470" y="1174128"/>
+                  </a:lnTo>
+                  <a:lnTo>
+                    <a:pt x="787847" y="1169829"/>
+                  </a:lnTo>
+                  <a:lnTo>
+                    <a:pt x="716225" y="1165510"/>
+                  </a:lnTo>
+                  <a:lnTo>
+                    <a:pt x="644602" y="1161171"/>
+                  </a:lnTo>
+                  <a:lnTo>
+                    <a:pt x="572980" y="1156813"/>
+                  </a:lnTo>
+                  <a:lnTo>
+                    <a:pt x="501357" y="1152436"/>
+                  </a:lnTo>
+                  <a:lnTo>
+                    <a:pt x="429735" y="1148038"/>
+                  </a:lnTo>
+                  <a:lnTo>
+                    <a:pt x="358112" y="1143621"/>
+                  </a:lnTo>
+                  <a:lnTo>
+                    <a:pt x="286490" y="1139184"/>
+                  </a:lnTo>
+                  <a:lnTo>
+                    <a:pt x="214867" y="1134726"/>
+                  </a:lnTo>
+                  <a:lnTo>
+                    <a:pt x="143245" y="1130249"/>
+                  </a:lnTo>
+                  <a:lnTo>
+                    <a:pt x="71622" y="1125751"/>
+                  </a:lnTo>
+                  <a:lnTo>
+                    <a:pt x="0" y="1121233"/>
                   </a:lnTo>
                   <a:close/>
                 </a:path>
@@ -3676,312 +3676,312 @@
           </p:nvSpPr>
           <p:spPr>
             <a:xfrm>
-              <a:off x="1172049" y="3441198"/>
-              <a:ext cx="7090630" cy="1469690"/>
+              <a:off x="1172049" y="3431944"/>
+              <a:ext cx="7090630" cy="1482823"/>
             </a:xfrm>
             <a:custGeom>
               <a:avLst/>
               <a:pathLst>
-                <a:path w="7090630" h="1469690">
+                <a:path w="7090630" h="1482823">
                   <a:moveTo>
                     <a:pt x="0" y="0"/>
                   </a:moveTo>
                   <a:lnTo>
-                    <a:pt x="71622" y="46270"/>
-                  </a:lnTo>
-                  <a:lnTo>
-                    <a:pt x="143245" y="91528"/>
-                  </a:lnTo>
-                  <a:lnTo>
-                    <a:pt x="214867" y="135796"/>
-                  </a:lnTo>
-                  <a:lnTo>
-                    <a:pt x="286490" y="179097"/>
-                  </a:lnTo>
-                  <a:lnTo>
-                    <a:pt x="358112" y="221451"/>
-                  </a:lnTo>
-                  <a:lnTo>
-                    <a:pt x="429735" y="262879"/>
-                  </a:lnTo>
-                  <a:lnTo>
-                    <a:pt x="501357" y="303400"/>
-                  </a:lnTo>
-                  <a:lnTo>
-                    <a:pt x="572980" y="343036"/>
-                  </a:lnTo>
-                  <a:lnTo>
-                    <a:pt x="644602" y="381805"/>
-                  </a:lnTo>
-                  <a:lnTo>
-                    <a:pt x="716225" y="419727"/>
-                  </a:lnTo>
-                  <a:lnTo>
-                    <a:pt x="787847" y="456819"/>
-                  </a:lnTo>
-                  <a:lnTo>
-                    <a:pt x="859470" y="493100"/>
-                  </a:lnTo>
-                  <a:lnTo>
-                    <a:pt x="931092" y="528588"/>
-                  </a:lnTo>
-                  <a:lnTo>
-                    <a:pt x="1002715" y="563299"/>
-                  </a:lnTo>
-                  <a:lnTo>
-                    <a:pt x="1074337" y="597252"/>
-                  </a:lnTo>
-                  <a:lnTo>
-                    <a:pt x="1145960" y="630463"/>
-                  </a:lnTo>
-                  <a:lnTo>
-                    <a:pt x="1217582" y="662947"/>
-                  </a:lnTo>
-                  <a:lnTo>
-                    <a:pt x="1289205" y="694721"/>
-                  </a:lnTo>
-                  <a:lnTo>
-                    <a:pt x="1360827" y="725800"/>
-                  </a:lnTo>
-                  <a:lnTo>
-                    <a:pt x="1432450" y="756199"/>
-                  </a:lnTo>
-                  <a:lnTo>
-                    <a:pt x="1504073" y="785934"/>
-                  </a:lnTo>
-                  <a:lnTo>
-                    <a:pt x="1575695" y="815019"/>
-                  </a:lnTo>
-                  <a:lnTo>
-                    <a:pt x="1647318" y="843467"/>
-                  </a:lnTo>
-                  <a:lnTo>
-                    <a:pt x="1718940" y="871294"/>
-                  </a:lnTo>
-                  <a:lnTo>
-                    <a:pt x="1790563" y="898512"/>
-                  </a:lnTo>
-                  <a:lnTo>
-                    <a:pt x="1862185" y="925135"/>
-                  </a:lnTo>
-                  <a:lnTo>
-                    <a:pt x="1933808" y="951176"/>
-                  </a:lnTo>
-                  <a:lnTo>
-                    <a:pt x="2005430" y="976647"/>
-                  </a:lnTo>
-                  <a:lnTo>
-                    <a:pt x="2077053" y="1001561"/>
-                  </a:lnTo>
-                  <a:lnTo>
-                    <a:pt x="2148675" y="1025931"/>
-                  </a:lnTo>
-                  <a:lnTo>
-                    <a:pt x="2220298" y="1049768"/>
-                  </a:lnTo>
-                  <a:lnTo>
-                    <a:pt x="2291920" y="1073083"/>
-                  </a:lnTo>
-                  <a:lnTo>
-                    <a:pt x="2363543" y="1095889"/>
-                  </a:lnTo>
-                  <a:lnTo>
-                    <a:pt x="2435165" y="1118196"/>
-                  </a:lnTo>
-                  <a:lnTo>
-                    <a:pt x="2506788" y="1140016"/>
-                  </a:lnTo>
-                  <a:lnTo>
-                    <a:pt x="2578410" y="1161358"/>
-                  </a:lnTo>
-                  <a:lnTo>
-                    <a:pt x="2650033" y="1182233"/>
-                  </a:lnTo>
-                  <a:lnTo>
-                    <a:pt x="2721655" y="1202652"/>
-                  </a:lnTo>
-                  <a:lnTo>
-                    <a:pt x="2793278" y="1222625"/>
-                  </a:lnTo>
-                  <a:lnTo>
-                    <a:pt x="2864901" y="1242161"/>
-                  </a:lnTo>
-                  <a:lnTo>
-                    <a:pt x="2936523" y="1261269"/>
-                  </a:lnTo>
-                  <a:lnTo>
-                    <a:pt x="3008146" y="1279960"/>
-                  </a:lnTo>
-                  <a:lnTo>
-                    <a:pt x="3079768" y="1288922"/>
-                  </a:lnTo>
-                  <a:lnTo>
-                    <a:pt x="3151391" y="1292556"/>
-                  </a:lnTo>
-                  <a:lnTo>
-                    <a:pt x="3223013" y="1296175"/>
-                  </a:lnTo>
-                  <a:lnTo>
-                    <a:pt x="3294636" y="1299777"/>
-                  </a:lnTo>
-                  <a:lnTo>
-                    <a:pt x="3366258" y="1303364"/>
-                  </a:lnTo>
-                  <a:lnTo>
-                    <a:pt x="3437881" y="1306935"/>
-                  </a:lnTo>
-                  <a:lnTo>
-                    <a:pt x="3509503" y="1310490"/>
-                  </a:lnTo>
-                  <a:lnTo>
-                    <a:pt x="3581126" y="1314029"/>
-                  </a:lnTo>
-                  <a:lnTo>
-                    <a:pt x="3652748" y="1317554"/>
-                  </a:lnTo>
-                  <a:lnTo>
-                    <a:pt x="3724371" y="1321062"/>
-                  </a:lnTo>
-                  <a:lnTo>
-                    <a:pt x="3795993" y="1324555"/>
-                  </a:lnTo>
-                  <a:lnTo>
-                    <a:pt x="3867616" y="1328033"/>
-                  </a:lnTo>
-                  <a:lnTo>
-                    <a:pt x="3939238" y="1331496"/>
-                  </a:lnTo>
-                  <a:lnTo>
-                    <a:pt x="4010861" y="1334943"/>
-                  </a:lnTo>
-                  <a:lnTo>
-                    <a:pt x="4082483" y="1338375"/>
-                  </a:lnTo>
-                  <a:lnTo>
-                    <a:pt x="4154106" y="1341792"/>
-                  </a:lnTo>
-                  <a:lnTo>
-                    <a:pt x="4225729" y="1345194"/>
-                  </a:lnTo>
-                  <a:lnTo>
-                    <a:pt x="4297351" y="1348581"/>
-                  </a:lnTo>
-                  <a:lnTo>
-                    <a:pt x="4368974" y="1351953"/>
-                  </a:lnTo>
-                  <a:lnTo>
-                    <a:pt x="4440596" y="1355311"/>
-                  </a:lnTo>
-                  <a:lnTo>
-                    <a:pt x="4512219" y="1358653"/>
-                  </a:lnTo>
-                  <a:lnTo>
-                    <a:pt x="4583841" y="1361981"/>
-                  </a:lnTo>
-                  <a:lnTo>
-                    <a:pt x="4655464" y="1365295"/>
-                  </a:lnTo>
-                  <a:lnTo>
-                    <a:pt x="4727086" y="1368594"/>
-                  </a:lnTo>
-                  <a:lnTo>
-                    <a:pt x="4798709" y="1371878"/>
-                  </a:lnTo>
-                  <a:lnTo>
-                    <a:pt x="4870331" y="1375148"/>
-                  </a:lnTo>
-                  <a:lnTo>
-                    <a:pt x="4941954" y="1378403"/>
-                  </a:lnTo>
-                  <a:lnTo>
-                    <a:pt x="5013576" y="1381644"/>
-                  </a:lnTo>
-                  <a:lnTo>
-                    <a:pt x="5085199" y="1384871"/>
-                  </a:lnTo>
-                  <a:lnTo>
-                    <a:pt x="5156821" y="1388084"/>
-                  </a:lnTo>
-                  <a:lnTo>
-                    <a:pt x="5228444" y="1391283"/>
-                  </a:lnTo>
-                  <a:lnTo>
-                    <a:pt x="5300066" y="1394467"/>
-                  </a:lnTo>
-                  <a:lnTo>
-                    <a:pt x="5371689" y="1397638"/>
-                  </a:lnTo>
-                  <a:lnTo>
-                    <a:pt x="5443311" y="1400795"/>
-                  </a:lnTo>
-                  <a:lnTo>
-                    <a:pt x="5514934" y="1403937"/>
-                  </a:lnTo>
-                  <a:lnTo>
-                    <a:pt x="5586557" y="1407066"/>
-                  </a:lnTo>
-                  <a:lnTo>
-                    <a:pt x="5658179" y="1410182"/>
-                  </a:lnTo>
-                  <a:lnTo>
-                    <a:pt x="5729802" y="1413283"/>
-                  </a:lnTo>
-                  <a:lnTo>
-                    <a:pt x="5801424" y="1416371"/>
-                  </a:lnTo>
-                  <a:lnTo>
-                    <a:pt x="5873047" y="1419445"/>
-                  </a:lnTo>
-                  <a:lnTo>
-                    <a:pt x="5944669" y="1422506"/>
-                  </a:lnTo>
-                  <a:lnTo>
-                    <a:pt x="6016292" y="1425554"/>
-                  </a:lnTo>
-                  <a:lnTo>
-                    <a:pt x="6087914" y="1428588"/>
-                  </a:lnTo>
-                  <a:lnTo>
-                    <a:pt x="6159537" y="1431608"/>
-                  </a:lnTo>
-                  <a:lnTo>
-                    <a:pt x="6231159" y="1434616"/>
-                  </a:lnTo>
-                  <a:lnTo>
-                    <a:pt x="6302782" y="1437610"/>
-                  </a:lnTo>
-                  <a:lnTo>
-                    <a:pt x="6374404" y="1440591"/>
-                  </a:lnTo>
-                  <a:lnTo>
-                    <a:pt x="6446027" y="1443559"/>
-                  </a:lnTo>
-                  <a:lnTo>
-                    <a:pt x="6517649" y="1446514"/>
-                  </a:lnTo>
-                  <a:lnTo>
-                    <a:pt x="6589272" y="1449456"/>
-                  </a:lnTo>
-                  <a:lnTo>
-                    <a:pt x="6660894" y="1452385"/>
-                  </a:lnTo>
-                  <a:lnTo>
-                    <a:pt x="6732517" y="1455301"/>
-                  </a:lnTo>
-                  <a:lnTo>
-                    <a:pt x="6804139" y="1458204"/>
-                  </a:lnTo>
-                  <a:lnTo>
-                    <a:pt x="6875762" y="1461095"/>
-                  </a:lnTo>
-                  <a:lnTo>
-                    <a:pt x="6947385" y="1463973"/>
-                  </a:lnTo>
-                  <a:lnTo>
-                    <a:pt x="7019007" y="1466838"/>
-                  </a:lnTo>
-                  <a:lnTo>
-                    <a:pt x="7090630" y="1469690"/>
+                    <a:pt x="71622" y="46686"/>
+                  </a:lnTo>
+                  <a:lnTo>
+                    <a:pt x="143245" y="92347"/>
+                  </a:lnTo>
+                  <a:lnTo>
+                    <a:pt x="214867" y="137005"/>
+                  </a:lnTo>
+                  <a:lnTo>
+                    <a:pt x="286490" y="180682"/>
+                  </a:lnTo>
+                  <a:lnTo>
+                    <a:pt x="358112" y="223399"/>
+                  </a:lnTo>
+                  <a:lnTo>
+                    <a:pt x="429735" y="265178"/>
+                  </a:lnTo>
+                  <a:lnTo>
+                    <a:pt x="501357" y="306040"/>
+                  </a:lnTo>
+                  <a:lnTo>
+                    <a:pt x="572980" y="346003"/>
+                  </a:lnTo>
+                  <a:lnTo>
+                    <a:pt x="644602" y="385089"/>
+                  </a:lnTo>
+                  <a:lnTo>
+                    <a:pt x="716225" y="423316"/>
+                  </a:lnTo>
+                  <a:lnTo>
+                    <a:pt x="787847" y="460704"/>
+                  </a:lnTo>
+                  <a:lnTo>
+                    <a:pt x="859470" y="497270"/>
+                  </a:lnTo>
+                  <a:lnTo>
+                    <a:pt x="931092" y="533033"/>
+                  </a:lnTo>
+                  <a:lnTo>
+                    <a:pt x="1002715" y="568010"/>
+                  </a:lnTo>
+                  <a:lnTo>
+                    <a:pt x="1074337" y="602219"/>
+                  </a:lnTo>
+                  <a:lnTo>
+                    <a:pt x="1145960" y="635677"/>
+                  </a:lnTo>
+                  <a:lnTo>
+                    <a:pt x="1217582" y="668399"/>
+                  </a:lnTo>
+                  <a:lnTo>
+                    <a:pt x="1289205" y="700403"/>
+                  </a:lnTo>
+                  <a:lnTo>
+                    <a:pt x="1360827" y="731704"/>
+                  </a:lnTo>
+                  <a:lnTo>
+                    <a:pt x="1432450" y="762317"/>
+                  </a:lnTo>
+                  <a:lnTo>
+                    <a:pt x="1504073" y="792258"/>
+                  </a:lnTo>
+                  <a:lnTo>
+                    <a:pt x="1575695" y="821541"/>
+                  </a:lnTo>
+                  <a:lnTo>
+                    <a:pt x="1647318" y="850181"/>
+                  </a:lnTo>
+                  <a:lnTo>
+                    <a:pt x="1718940" y="878191"/>
+                  </a:lnTo>
+                  <a:lnTo>
+                    <a:pt x="1790563" y="905586"/>
+                  </a:lnTo>
+                  <a:lnTo>
+                    <a:pt x="1862185" y="932380"/>
+                  </a:lnTo>
+                  <a:lnTo>
+                    <a:pt x="1933808" y="958585"/>
+                  </a:lnTo>
+                  <a:lnTo>
+                    <a:pt x="2005430" y="984214"/>
+                  </a:lnTo>
+                  <a:lnTo>
+                    <a:pt x="2077053" y="1009280"/>
+                  </a:lnTo>
+                  <a:lnTo>
+                    <a:pt x="2148675" y="1033796"/>
+                  </a:lnTo>
+                  <a:lnTo>
+                    <a:pt x="2220298" y="1057773"/>
+                  </a:lnTo>
+                  <a:lnTo>
+                    <a:pt x="2291920" y="1081224"/>
+                  </a:lnTo>
+                  <a:lnTo>
+                    <a:pt x="2363543" y="1104159"/>
+                  </a:lnTo>
+                  <a:lnTo>
+                    <a:pt x="2435165" y="1126590"/>
+                  </a:lnTo>
+                  <a:lnTo>
+                    <a:pt x="2506788" y="1148529"/>
+                  </a:lnTo>
+                  <a:lnTo>
+                    <a:pt x="2578410" y="1169986"/>
+                  </a:lnTo>
+                  <a:lnTo>
+                    <a:pt x="2650033" y="1190971"/>
+                  </a:lnTo>
+                  <a:lnTo>
+                    <a:pt x="2721655" y="1211496"/>
+                  </a:lnTo>
+                  <a:lnTo>
+                    <a:pt x="2793278" y="1231569"/>
+                  </a:lnTo>
+                  <a:lnTo>
+                    <a:pt x="2864901" y="1251202"/>
+                  </a:lnTo>
+                  <a:lnTo>
+                    <a:pt x="2936523" y="1270403"/>
+                  </a:lnTo>
+                  <a:lnTo>
+                    <a:pt x="3008146" y="1289183"/>
+                  </a:lnTo>
+                  <a:lnTo>
+                    <a:pt x="3079768" y="1298232"/>
+                  </a:lnTo>
+                  <a:lnTo>
+                    <a:pt x="3151391" y="1301954"/>
+                  </a:lnTo>
+                  <a:lnTo>
+                    <a:pt x="3223013" y="1305658"/>
+                  </a:lnTo>
+                  <a:lnTo>
+                    <a:pt x="3294636" y="1309347"/>
+                  </a:lnTo>
+                  <a:lnTo>
+                    <a:pt x="3366258" y="1313018"/>
+                  </a:lnTo>
+                  <a:lnTo>
+                    <a:pt x="3437881" y="1316673"/>
+                  </a:lnTo>
+                  <a:lnTo>
+                    <a:pt x="3509503" y="1320312"/>
+                  </a:lnTo>
+                  <a:lnTo>
+                    <a:pt x="3581126" y="1323934"/>
+                  </a:lnTo>
+                  <a:lnTo>
+                    <a:pt x="3652748" y="1327540"/>
+                  </a:lnTo>
+                  <a:lnTo>
+                    <a:pt x="3724371" y="1331130"/>
+                  </a:lnTo>
+                  <a:lnTo>
+                    <a:pt x="3795993" y="1334703"/>
+                  </a:lnTo>
+                  <a:lnTo>
+                    <a:pt x="3867616" y="1338261"/>
+                  </a:lnTo>
+                  <a:lnTo>
+                    <a:pt x="3939238" y="1341802"/>
+                  </a:lnTo>
+                  <a:lnTo>
+                    <a:pt x="4010861" y="1345328"/>
+                  </a:lnTo>
+                  <a:lnTo>
+                    <a:pt x="4082483" y="1348838"/>
+                  </a:lnTo>
+                  <a:lnTo>
+                    <a:pt x="4154106" y="1352332"/>
+                  </a:lnTo>
+                  <a:lnTo>
+                    <a:pt x="4225729" y="1355810"/>
+                  </a:lnTo>
+                  <a:lnTo>
+                    <a:pt x="4297351" y="1359272"/>
+                  </a:lnTo>
+                  <a:lnTo>
+                    <a:pt x="4368974" y="1362719"/>
+                  </a:lnTo>
+                  <a:lnTo>
+                    <a:pt x="4440596" y="1366151"/>
+                  </a:lnTo>
+                  <a:lnTo>
+                    <a:pt x="4512219" y="1369567"/>
+                  </a:lnTo>
+                  <a:lnTo>
+                    <a:pt x="4583841" y="1372967"/>
+                  </a:lnTo>
+                  <a:lnTo>
+                    <a:pt x="4655464" y="1376353"/>
+                  </a:lnTo>
+                  <a:lnTo>
+                    <a:pt x="4727086" y="1379723"/>
+                  </a:lnTo>
+                  <a:lnTo>
+                    <a:pt x="4798709" y="1383078"/>
+                  </a:lnTo>
+                  <a:lnTo>
+                    <a:pt x="4870331" y="1386418"/>
+                  </a:lnTo>
+                  <a:lnTo>
+                    <a:pt x="4941954" y="1389742"/>
+                  </a:lnTo>
+                  <a:lnTo>
+                    <a:pt x="5013576" y="1393052"/>
+                  </a:lnTo>
+                  <a:lnTo>
+                    <a:pt x="5085199" y="1396347"/>
+                  </a:lnTo>
+                  <a:lnTo>
+                    <a:pt x="5156821" y="1399627"/>
+                  </a:lnTo>
+                  <a:lnTo>
+                    <a:pt x="5228444" y="1402893"/>
+                  </a:lnTo>
+                  <a:lnTo>
+                    <a:pt x="5300066" y="1406143"/>
+                  </a:lnTo>
+                  <a:lnTo>
+                    <a:pt x="5371689" y="1409379"/>
+                  </a:lnTo>
+                  <a:lnTo>
+                    <a:pt x="5443311" y="1412601"/>
+                  </a:lnTo>
+                  <a:lnTo>
+                    <a:pt x="5514934" y="1415808"/>
+                  </a:lnTo>
+                  <a:lnTo>
+                    <a:pt x="5586557" y="1419000"/>
+                  </a:lnTo>
+                  <a:lnTo>
+                    <a:pt x="5658179" y="1422179"/>
+                  </a:lnTo>
+                  <a:lnTo>
+                    <a:pt x="5729802" y="1425343"/>
+                  </a:lnTo>
+                  <a:lnTo>
+                    <a:pt x="5801424" y="1428492"/>
+                  </a:lnTo>
+                  <a:lnTo>
+                    <a:pt x="5873047" y="1431628"/>
+                  </a:lnTo>
+                  <a:lnTo>
+                    <a:pt x="5944669" y="1434749"/>
+                  </a:lnTo>
+                  <a:lnTo>
+                    <a:pt x="6016292" y="1437856"/>
+                  </a:lnTo>
+                  <a:lnTo>
+                    <a:pt x="6087914" y="1440950"/>
+                  </a:lnTo>
+                  <a:lnTo>
+                    <a:pt x="6159537" y="1444029"/>
+                  </a:lnTo>
+                  <a:lnTo>
+                    <a:pt x="6231159" y="1447095"/>
+                  </a:lnTo>
+                  <a:lnTo>
+                    <a:pt x="6302782" y="1450147"/>
+                  </a:lnTo>
+                  <a:lnTo>
+                    <a:pt x="6374404" y="1453185"/>
+                  </a:lnTo>
+                  <a:lnTo>
+                    <a:pt x="6446027" y="1456209"/>
+                  </a:lnTo>
+                  <a:lnTo>
+                    <a:pt x="6517649" y="1459220"/>
+                  </a:lnTo>
+                  <a:lnTo>
+                    <a:pt x="6589272" y="1462217"/>
+                  </a:lnTo>
+                  <a:lnTo>
+                    <a:pt x="6660894" y="1465201"/>
+                  </a:lnTo>
+                  <a:lnTo>
+                    <a:pt x="6732517" y="1468171"/>
+                  </a:lnTo>
+                  <a:lnTo>
+                    <a:pt x="6804139" y="1471128"/>
+                  </a:lnTo>
+                  <a:lnTo>
+                    <a:pt x="6875762" y="1474072"/>
+                  </a:lnTo>
+                  <a:lnTo>
+                    <a:pt x="6947385" y="1477002"/>
+                  </a:lnTo>
+                  <a:lnTo>
+                    <a:pt x="7019007" y="1479919"/>
+                  </a:lnTo>
+                  <a:lnTo>
+                    <a:pt x="7090630" y="1482823"/>
                   </a:lnTo>
                 </a:path>
               </a:pathLst>
@@ -4001,309 +4001,309 @@
           </p:nvSpPr>
           <p:spPr>
             <a:xfrm>
-              <a:off x="1172049" y="4557688"/>
-              <a:ext cx="7090630" cy="762448"/>
+              <a:off x="1172049" y="4553178"/>
+              <a:ext cx="7090630" cy="768338"/>
             </a:xfrm>
             <a:custGeom>
               <a:avLst/>
               <a:pathLst>
-                <a:path w="7090630" h="762448">
+                <a:path w="7090630" h="768338">
                   <a:moveTo>
-                    <a:pt x="7090630" y="762448"/>
+                    <a:pt x="7090630" y="768338"/>
                   </a:moveTo>
                   <a:lnTo>
-                    <a:pt x="7019007" y="757148"/>
-                  </a:lnTo>
-                  <a:lnTo>
-                    <a:pt x="6947385" y="751729"/>
-                  </a:lnTo>
-                  <a:lnTo>
-                    <a:pt x="6875762" y="746188"/>
-                  </a:lnTo>
-                  <a:lnTo>
-                    <a:pt x="6804139" y="740524"/>
-                  </a:lnTo>
-                  <a:lnTo>
-                    <a:pt x="6732517" y="734733"/>
-                  </a:lnTo>
-                  <a:lnTo>
-                    <a:pt x="6660894" y="728813"/>
-                  </a:lnTo>
-                  <a:lnTo>
-                    <a:pt x="6589272" y="722761"/>
-                  </a:lnTo>
-                  <a:lnTo>
-                    <a:pt x="6517649" y="716573"/>
-                  </a:lnTo>
-                  <a:lnTo>
-                    <a:pt x="6446027" y="710247"/>
-                  </a:lnTo>
-                  <a:lnTo>
-                    <a:pt x="6374404" y="703779"/>
-                  </a:lnTo>
-                  <a:lnTo>
-                    <a:pt x="6302782" y="697167"/>
-                  </a:lnTo>
-                  <a:lnTo>
-                    <a:pt x="6231159" y="690407"/>
-                  </a:lnTo>
-                  <a:lnTo>
-                    <a:pt x="6159537" y="683496"/>
-                  </a:lnTo>
-                  <a:lnTo>
-                    <a:pt x="6087914" y="676430"/>
-                  </a:lnTo>
-                  <a:lnTo>
-                    <a:pt x="6016292" y="669206"/>
-                  </a:lnTo>
-                  <a:lnTo>
-                    <a:pt x="5944669" y="661821"/>
-                  </a:lnTo>
-                  <a:lnTo>
-                    <a:pt x="5873047" y="654271"/>
-                  </a:lnTo>
-                  <a:lnTo>
-                    <a:pt x="5801424" y="646552"/>
-                  </a:lnTo>
-                  <a:lnTo>
-                    <a:pt x="5729802" y="638661"/>
-                  </a:lnTo>
-                  <a:lnTo>
-                    <a:pt x="5658179" y="630593"/>
-                  </a:lnTo>
-                  <a:lnTo>
-                    <a:pt x="5586557" y="622344"/>
-                  </a:lnTo>
-                  <a:lnTo>
-                    <a:pt x="5514934" y="613912"/>
-                  </a:lnTo>
-                  <a:lnTo>
-                    <a:pt x="5443311" y="605290"/>
-                  </a:lnTo>
-                  <a:lnTo>
-                    <a:pt x="5371689" y="596476"/>
-                  </a:lnTo>
-                  <a:lnTo>
-                    <a:pt x="5300066" y="587465"/>
-                  </a:lnTo>
-                  <a:lnTo>
-                    <a:pt x="5228444" y="578253"/>
-                  </a:lnTo>
-                  <a:lnTo>
-                    <a:pt x="5156821" y="568835"/>
-                  </a:lnTo>
-                  <a:lnTo>
-                    <a:pt x="5085199" y="559206"/>
-                  </a:lnTo>
-                  <a:lnTo>
-                    <a:pt x="5013576" y="549362"/>
-                  </a:lnTo>
-                  <a:lnTo>
-                    <a:pt x="4941954" y="539297"/>
-                  </a:lnTo>
-                  <a:lnTo>
-                    <a:pt x="4870331" y="529008"/>
-                  </a:lnTo>
-                  <a:lnTo>
-                    <a:pt x="4798709" y="518489"/>
-                  </a:lnTo>
-                  <a:lnTo>
-                    <a:pt x="4727086" y="507735"/>
-                  </a:lnTo>
-                  <a:lnTo>
-                    <a:pt x="4655464" y="496740"/>
-                  </a:lnTo>
-                  <a:lnTo>
-                    <a:pt x="4583841" y="485499"/>
-                  </a:lnTo>
-                  <a:lnTo>
-                    <a:pt x="4512219" y="474007"/>
-                  </a:lnTo>
-                  <a:lnTo>
-                    <a:pt x="4440596" y="462259"/>
-                  </a:lnTo>
-                  <a:lnTo>
-                    <a:pt x="4368974" y="450247"/>
-                  </a:lnTo>
-                  <a:lnTo>
-                    <a:pt x="4297351" y="437967"/>
-                  </a:lnTo>
-                  <a:lnTo>
-                    <a:pt x="4225729" y="425413"/>
-                  </a:lnTo>
-                  <a:lnTo>
-                    <a:pt x="4154106" y="412578"/>
-                  </a:lnTo>
-                  <a:lnTo>
-                    <a:pt x="4082483" y="399456"/>
-                  </a:lnTo>
-                  <a:lnTo>
-                    <a:pt x="4010861" y="386040"/>
-                  </a:lnTo>
-                  <a:lnTo>
-                    <a:pt x="3939238" y="372325"/>
-                  </a:lnTo>
-                  <a:lnTo>
-                    <a:pt x="3867616" y="358303"/>
-                  </a:lnTo>
-                  <a:lnTo>
-                    <a:pt x="3795993" y="343968"/>
-                  </a:lnTo>
-                  <a:lnTo>
-                    <a:pt x="3724371" y="329312"/>
-                  </a:lnTo>
-                  <a:lnTo>
-                    <a:pt x="3652748" y="314329"/>
-                  </a:lnTo>
-                  <a:lnTo>
-                    <a:pt x="3581126" y="299010"/>
-                  </a:lnTo>
-                  <a:lnTo>
-                    <a:pt x="3509503" y="283350"/>
-                  </a:lnTo>
-                  <a:lnTo>
-                    <a:pt x="3437881" y="267339"/>
-                  </a:lnTo>
-                  <a:lnTo>
-                    <a:pt x="3366258" y="250970"/>
-                  </a:lnTo>
-                  <a:lnTo>
-                    <a:pt x="3294636" y="234235"/>
-                  </a:lnTo>
-                  <a:lnTo>
-                    <a:pt x="3223013" y="217126"/>
-                  </a:lnTo>
-                  <a:lnTo>
-                    <a:pt x="3151391" y="199635"/>
-                  </a:lnTo>
-                  <a:lnTo>
-                    <a:pt x="3079768" y="181752"/>
-                  </a:lnTo>
-                  <a:lnTo>
-                    <a:pt x="3008146" y="168782"/>
-                  </a:lnTo>
-                  <a:lnTo>
-                    <a:pt x="2936523" y="165115"/>
-                  </a:lnTo>
-                  <a:lnTo>
-                    <a:pt x="2864901" y="161432"/>
-                  </a:lnTo>
-                  <a:lnTo>
-                    <a:pt x="2793278" y="157734"/>
-                  </a:lnTo>
-                  <a:lnTo>
-                    <a:pt x="2721655" y="154018"/>
-                  </a:lnTo>
-                  <a:lnTo>
-                    <a:pt x="2650033" y="150287"/>
-                  </a:lnTo>
-                  <a:lnTo>
-                    <a:pt x="2578410" y="146538"/>
-                  </a:lnTo>
-                  <a:lnTo>
-                    <a:pt x="2506788" y="142774"/>
-                  </a:lnTo>
-                  <a:lnTo>
-                    <a:pt x="2435165" y="138992"/>
-                  </a:lnTo>
-                  <a:lnTo>
-                    <a:pt x="2363543" y="135194"/>
-                  </a:lnTo>
-                  <a:lnTo>
-                    <a:pt x="2291920" y="131380"/>
-                  </a:lnTo>
-                  <a:lnTo>
-                    <a:pt x="2220298" y="127548"/>
-                  </a:lnTo>
-                  <a:lnTo>
-                    <a:pt x="2148675" y="123700"/>
-                  </a:lnTo>
-                  <a:lnTo>
-                    <a:pt x="2077053" y="119834"/>
-                  </a:lnTo>
-                  <a:lnTo>
-                    <a:pt x="2005430" y="115952"/>
-                  </a:lnTo>
-                  <a:lnTo>
-                    <a:pt x="1933808" y="112052"/>
-                  </a:lnTo>
-                  <a:lnTo>
-                    <a:pt x="1862185" y="108135"/>
-                  </a:lnTo>
-                  <a:lnTo>
-                    <a:pt x="1790563" y="104201"/>
-                  </a:lnTo>
-                  <a:lnTo>
-                    <a:pt x="1718940" y="100249"/>
-                  </a:lnTo>
-                  <a:lnTo>
-                    <a:pt x="1647318" y="96280"/>
-                  </a:lnTo>
-                  <a:lnTo>
-                    <a:pt x="1575695" y="92294"/>
-                  </a:lnTo>
-                  <a:lnTo>
-                    <a:pt x="1504073" y="88290"/>
-                  </a:lnTo>
-                  <a:lnTo>
-                    <a:pt x="1432450" y="84268"/>
-                  </a:lnTo>
-                  <a:lnTo>
-                    <a:pt x="1360827" y="80229"/>
-                  </a:lnTo>
-                  <a:lnTo>
-                    <a:pt x="1289205" y="76171"/>
-                  </a:lnTo>
-                  <a:lnTo>
-                    <a:pt x="1217582" y="72096"/>
-                  </a:lnTo>
-                  <a:lnTo>
-                    <a:pt x="1145960" y="68003"/>
-                  </a:lnTo>
-                  <a:lnTo>
-                    <a:pt x="1074337" y="63892"/>
-                  </a:lnTo>
-                  <a:lnTo>
-                    <a:pt x="1002715" y="59762"/>
-                  </a:lnTo>
-                  <a:lnTo>
-                    <a:pt x="931092" y="55615"/>
-                  </a:lnTo>
-                  <a:lnTo>
-                    <a:pt x="859470" y="51449"/>
-                  </a:lnTo>
-                  <a:lnTo>
-                    <a:pt x="787847" y="47264"/>
-                  </a:lnTo>
-                  <a:lnTo>
-                    <a:pt x="716225" y="43061"/>
-                  </a:lnTo>
-                  <a:lnTo>
-                    <a:pt x="644602" y="38840"/>
-                  </a:lnTo>
-                  <a:lnTo>
-                    <a:pt x="572980" y="34600"/>
-                  </a:lnTo>
-                  <a:lnTo>
-                    <a:pt x="501357" y="30341"/>
-                  </a:lnTo>
-                  <a:lnTo>
-                    <a:pt x="429735" y="26064"/>
-                  </a:lnTo>
-                  <a:lnTo>
-                    <a:pt x="358112" y="21767"/>
-                  </a:lnTo>
-                  <a:lnTo>
-                    <a:pt x="286490" y="17452"/>
-                  </a:lnTo>
-                  <a:lnTo>
-                    <a:pt x="214867" y="13118"/>
-                  </a:lnTo>
-                  <a:lnTo>
-                    <a:pt x="143245" y="8764"/>
-                  </a:lnTo>
-                  <a:lnTo>
-                    <a:pt x="71622" y="4392"/>
+                    <a:pt x="7019007" y="763043"/>
+                  </a:lnTo>
+                  <a:lnTo>
+                    <a:pt x="6947385" y="757630"/>
+                  </a:lnTo>
+                  <a:lnTo>
+                    <a:pt x="6875762" y="752095"/>
+                  </a:lnTo>
+                  <a:lnTo>
+                    <a:pt x="6804139" y="746435"/>
+                  </a:lnTo>
+                  <a:lnTo>
+                    <a:pt x="6732517" y="740648"/>
+                  </a:lnTo>
+                  <a:lnTo>
+                    <a:pt x="6660894" y="734732"/>
+                  </a:lnTo>
+                  <a:lnTo>
+                    <a:pt x="6589272" y="728682"/>
+                  </a:lnTo>
+                  <a:lnTo>
+                    <a:pt x="6517649" y="722497"/>
+                  </a:lnTo>
+                  <a:lnTo>
+                    <a:pt x="6446027" y="716173"/>
+                  </a:lnTo>
+                  <a:lnTo>
+                    <a:pt x="6374404" y="709707"/>
+                  </a:lnTo>
+                  <a:lnTo>
+                    <a:pt x="6302782" y="703095"/>
+                  </a:lnTo>
+                  <a:lnTo>
+                    <a:pt x="6231159" y="696335"/>
+                  </a:lnTo>
+                  <a:lnTo>
+                    <a:pt x="6159537" y="689423"/>
+                  </a:lnTo>
+                  <a:lnTo>
+                    <a:pt x="6087914" y="682356"/>
+                  </a:lnTo>
+                  <a:lnTo>
+                    <a:pt x="6016292" y="675130"/>
+                  </a:lnTo>
+                  <a:lnTo>
+                    <a:pt x="5944669" y="667742"/>
+                  </a:lnTo>
+                  <a:lnTo>
+                    <a:pt x="5873047" y="660188"/>
+                  </a:lnTo>
+                  <a:lnTo>
+                    <a:pt x="5801424" y="652464"/>
+                  </a:lnTo>
+                  <a:lnTo>
+                    <a:pt x="5729802" y="644567"/>
+                  </a:lnTo>
+                  <a:lnTo>
+                    <a:pt x="5658179" y="636493"/>
+                  </a:lnTo>
+                  <a:lnTo>
+                    <a:pt x="5586557" y="628237"/>
+                  </a:lnTo>
+                  <a:lnTo>
+                    <a:pt x="5514934" y="619795"/>
+                  </a:lnTo>
+                  <a:lnTo>
+                    <a:pt x="5443311" y="611164"/>
+                  </a:lnTo>
+                  <a:lnTo>
+                    <a:pt x="5371689" y="602339"/>
+                  </a:lnTo>
+                  <a:lnTo>
+                    <a:pt x="5300066" y="593316"/>
+                  </a:lnTo>
+                  <a:lnTo>
+                    <a:pt x="5228444" y="584091"/>
+                  </a:lnTo>
+                  <a:lnTo>
+                    <a:pt x="5156821" y="574658"/>
+                  </a:lnTo>
+                  <a:lnTo>
+                    <a:pt x="5085199" y="565013"/>
+                  </a:lnTo>
+                  <a:lnTo>
+                    <a:pt x="5013576" y="555152"/>
+                  </a:lnTo>
+                  <a:lnTo>
+                    <a:pt x="4941954" y="545069"/>
+                  </a:lnTo>
+                  <a:lnTo>
+                    <a:pt x="4870331" y="534759"/>
+                  </a:lnTo>
+                  <a:lnTo>
+                    <a:pt x="4798709" y="524219"/>
+                  </a:lnTo>
+                  <a:lnTo>
+                    <a:pt x="4727086" y="513441"/>
+                  </a:lnTo>
+                  <a:lnTo>
+                    <a:pt x="4655464" y="502421"/>
+                  </a:lnTo>
+                  <a:lnTo>
+                    <a:pt x="4583841" y="491154"/>
+                  </a:lnTo>
+                  <a:lnTo>
+                    <a:pt x="4512219" y="479634"/>
+                  </a:lnTo>
+                  <a:lnTo>
+                    <a:pt x="4440596" y="467855"/>
+                  </a:lnTo>
+                  <a:lnTo>
+                    <a:pt x="4368974" y="455811"/>
+                  </a:lnTo>
+                  <a:lnTo>
+                    <a:pt x="4297351" y="443497"/>
+                  </a:lnTo>
+                  <a:lnTo>
+                    <a:pt x="4225729" y="430906"/>
+                  </a:lnTo>
+                  <a:lnTo>
+                    <a:pt x="4154106" y="418033"/>
+                  </a:lnTo>
+                  <a:lnTo>
+                    <a:pt x="4082483" y="404870"/>
+                  </a:lnTo>
+                  <a:lnTo>
+                    <a:pt x="4010861" y="391412"/>
+                  </a:lnTo>
+                  <a:lnTo>
+                    <a:pt x="3939238" y="377651"/>
+                  </a:lnTo>
+                  <a:lnTo>
+                    <a:pt x="3867616" y="363582"/>
+                  </a:lnTo>
+                  <a:lnTo>
+                    <a:pt x="3795993" y="349196"/>
+                  </a:lnTo>
+                  <a:lnTo>
+                    <a:pt x="3724371" y="334487"/>
+                  </a:lnTo>
+                  <a:lnTo>
+                    <a:pt x="3652748" y="319448"/>
+                  </a:lnTo>
+                  <a:lnTo>
+                    <a:pt x="3581126" y="304072"/>
+                  </a:lnTo>
+                  <a:lnTo>
+                    <a:pt x="3509503" y="288349"/>
+                  </a:lnTo>
+                  <a:lnTo>
+                    <a:pt x="3437881" y="272274"/>
+                  </a:lnTo>
+                  <a:lnTo>
+                    <a:pt x="3366258" y="255838"/>
+                  </a:lnTo>
+                  <a:lnTo>
+                    <a:pt x="3294636" y="239032"/>
+                  </a:lnTo>
+                  <a:lnTo>
+                    <a:pt x="3223013" y="221849"/>
+                  </a:lnTo>
+                  <a:lnTo>
+                    <a:pt x="3151391" y="204280"/>
+                  </a:lnTo>
+                  <a:lnTo>
+                    <a:pt x="3079768" y="186316"/>
+                  </a:lnTo>
+                  <a:lnTo>
+                    <a:pt x="3008146" y="173260"/>
+                  </a:lnTo>
+                  <a:lnTo>
+                    <a:pt x="2936523" y="169505"/>
+                  </a:lnTo>
+                  <a:lnTo>
+                    <a:pt x="2864901" y="165732"/>
+                  </a:lnTo>
+                  <a:lnTo>
+                    <a:pt x="2793278" y="161943"/>
+                  </a:lnTo>
+                  <a:lnTo>
+                    <a:pt x="2721655" y="158136"/>
+                  </a:lnTo>
+                  <a:lnTo>
+                    <a:pt x="2650033" y="154313"/>
+                  </a:lnTo>
+                  <a:lnTo>
+                    <a:pt x="2578410" y="150472"/>
+                  </a:lnTo>
+                  <a:lnTo>
+                    <a:pt x="2506788" y="146613"/>
+                  </a:lnTo>
+                  <a:lnTo>
+                    <a:pt x="2435165" y="142738"/>
+                  </a:lnTo>
+                  <a:lnTo>
+                    <a:pt x="2363543" y="138844"/>
+                  </a:lnTo>
+                  <a:lnTo>
+                    <a:pt x="2291920" y="134933"/>
+                  </a:lnTo>
+                  <a:lnTo>
+                    <a:pt x="2220298" y="131005"/>
+                  </a:lnTo>
+                  <a:lnTo>
+                    <a:pt x="2148675" y="127058"/>
+                  </a:lnTo>
+                  <a:lnTo>
+                    <a:pt x="2077053" y="123094"/>
+                  </a:lnTo>
+                  <a:lnTo>
+                    <a:pt x="2005430" y="119112"/>
+                  </a:lnTo>
+                  <a:lnTo>
+                    <a:pt x="1933808" y="115112"/>
+                  </a:lnTo>
+                  <a:lnTo>
+                    <a:pt x="1862185" y="111094"/>
+                  </a:lnTo>
+                  <a:lnTo>
+                    <a:pt x="1790563" y="107058"/>
+                  </a:lnTo>
+                  <a:lnTo>
+                    <a:pt x="1718940" y="103003"/>
+                  </a:lnTo>
+                  <a:lnTo>
+                    <a:pt x="1647318" y="98930"/>
+                  </a:lnTo>
+                  <a:lnTo>
+                    <a:pt x="1575695" y="94839"/>
+                  </a:lnTo>
+                  <a:lnTo>
+                    <a:pt x="1504073" y="90729"/>
+                  </a:lnTo>
+                  <a:lnTo>
+                    <a:pt x="1432450" y="86601"/>
+                  </a:lnTo>
+                  <a:lnTo>
+                    <a:pt x="1360827" y="82453"/>
+                  </a:lnTo>
+                  <a:lnTo>
+                    <a:pt x="1289205" y="78288"/>
+                  </a:lnTo>
+                  <a:lnTo>
+                    <a:pt x="1217582" y="74103"/>
+                  </a:lnTo>
+                  <a:lnTo>
+                    <a:pt x="1145960" y="69900"/>
+                  </a:lnTo>
+                  <a:lnTo>
+                    <a:pt x="1074337" y="65677"/>
+                  </a:lnTo>
+                  <a:lnTo>
+                    <a:pt x="1002715" y="61435"/>
+                  </a:lnTo>
+                  <a:lnTo>
+                    <a:pt x="931092" y="57175"/>
+                  </a:lnTo>
+                  <a:lnTo>
+                    <a:pt x="859470" y="52894"/>
+                  </a:lnTo>
+                  <a:lnTo>
+                    <a:pt x="787847" y="48595"/>
+                  </a:lnTo>
+                  <a:lnTo>
+                    <a:pt x="716225" y="44276"/>
+                  </a:lnTo>
+                  <a:lnTo>
+                    <a:pt x="644602" y="39938"/>
+                  </a:lnTo>
+                  <a:lnTo>
+                    <a:pt x="572980" y="35580"/>
+                  </a:lnTo>
+                  <a:lnTo>
+                    <a:pt x="501357" y="31202"/>
+                  </a:lnTo>
+                  <a:lnTo>
+                    <a:pt x="429735" y="26805"/>
+                  </a:lnTo>
+                  <a:lnTo>
+                    <a:pt x="358112" y="22387"/>
+                  </a:lnTo>
+                  <a:lnTo>
+                    <a:pt x="286490" y="17950"/>
+                  </a:lnTo>
+                  <a:lnTo>
+                    <a:pt x="214867" y="13493"/>
+                  </a:lnTo>
+                  <a:lnTo>
+                    <a:pt x="143245" y="9015"/>
+                  </a:lnTo>
+                  <a:lnTo>
+                    <a:pt x="71622" y="4518"/>
                   </a:lnTo>
                   <a:lnTo>
                     <a:pt x="0" y="0"/>
@@ -4326,312 +4326,312 @@
           </p:nvSpPr>
           <p:spPr>
             <a:xfrm>
-              <a:off x="1172049" y="4102903"/>
-              <a:ext cx="7090630" cy="1062861"/>
+              <a:off x="1172049" y="4096442"/>
+              <a:ext cx="7090630" cy="1071636"/>
             </a:xfrm>
             <a:custGeom>
               <a:avLst/>
               <a:pathLst>
-                <a:path w="7090630" h="1062861">
+                <a:path w="7090630" h="1071636">
                   <a:moveTo>
                     <a:pt x="0" y="0"/>
                   </a:moveTo>
                   <a:lnTo>
-                    <a:pt x="71622" y="19151"/>
-                  </a:lnTo>
-                  <a:lnTo>
-                    <a:pt x="143245" y="38051"/>
-                  </a:lnTo>
-                  <a:lnTo>
-                    <a:pt x="214867" y="56702"/>
-                  </a:lnTo>
-                  <a:lnTo>
-                    <a:pt x="286490" y="75107"/>
-                  </a:lnTo>
-                  <a:lnTo>
-                    <a:pt x="358112" y="93270"/>
-                  </a:lnTo>
-                  <a:lnTo>
-                    <a:pt x="429735" y="111194"/>
-                  </a:lnTo>
-                  <a:lnTo>
-                    <a:pt x="501357" y="128881"/>
-                  </a:lnTo>
-                  <a:lnTo>
-                    <a:pt x="572980" y="146336"/>
-                  </a:lnTo>
-                  <a:lnTo>
-                    <a:pt x="644602" y="163561"/>
-                  </a:lnTo>
-                  <a:lnTo>
-                    <a:pt x="716225" y="180559"/>
-                  </a:lnTo>
-                  <a:lnTo>
-                    <a:pt x="787847" y="197333"/>
-                  </a:lnTo>
-                  <a:lnTo>
-                    <a:pt x="859470" y="213886"/>
-                  </a:lnTo>
-                  <a:lnTo>
-                    <a:pt x="931092" y="230222"/>
-                  </a:lnTo>
-                  <a:lnTo>
-                    <a:pt x="1002715" y="246342"/>
-                  </a:lnTo>
-                  <a:lnTo>
-                    <a:pt x="1074337" y="262250"/>
-                  </a:lnTo>
-                  <a:lnTo>
-                    <a:pt x="1145960" y="277948"/>
-                  </a:lnTo>
-                  <a:lnTo>
-                    <a:pt x="1217582" y="293440"/>
-                  </a:lnTo>
-                  <a:lnTo>
-                    <a:pt x="1289205" y="308727"/>
-                  </a:lnTo>
-                  <a:lnTo>
-                    <a:pt x="1360827" y="323814"/>
-                  </a:lnTo>
-                  <a:lnTo>
-                    <a:pt x="1432450" y="338701"/>
-                  </a:lnTo>
-                  <a:lnTo>
-                    <a:pt x="1504073" y="353393"/>
-                  </a:lnTo>
-                  <a:lnTo>
-                    <a:pt x="1575695" y="367891"/>
-                  </a:lnTo>
-                  <a:lnTo>
-                    <a:pt x="1647318" y="382199"/>
-                  </a:lnTo>
-                  <a:lnTo>
-                    <a:pt x="1718940" y="396317"/>
-                  </a:lnTo>
-                  <a:lnTo>
-                    <a:pt x="1790563" y="410250"/>
-                  </a:lnTo>
-                  <a:lnTo>
-                    <a:pt x="1862185" y="424000"/>
-                  </a:lnTo>
-                  <a:lnTo>
-                    <a:pt x="1933808" y="437568"/>
-                  </a:lnTo>
-                  <a:lnTo>
-                    <a:pt x="2005430" y="450958"/>
-                  </a:lnTo>
-                  <a:lnTo>
-                    <a:pt x="2077053" y="464171"/>
-                  </a:lnTo>
-                  <a:lnTo>
-                    <a:pt x="2148675" y="477210"/>
-                  </a:lnTo>
-                  <a:lnTo>
-                    <a:pt x="2220298" y="490078"/>
-                  </a:lnTo>
-                  <a:lnTo>
-                    <a:pt x="2291920" y="502776"/>
-                  </a:lnTo>
-                  <a:lnTo>
-                    <a:pt x="2363543" y="515307"/>
-                  </a:lnTo>
-                  <a:lnTo>
-                    <a:pt x="2435165" y="527673"/>
-                  </a:lnTo>
-                  <a:lnTo>
-                    <a:pt x="2506788" y="539876"/>
-                  </a:lnTo>
-                  <a:lnTo>
-                    <a:pt x="2578410" y="551919"/>
-                  </a:lnTo>
-                  <a:lnTo>
-                    <a:pt x="2650033" y="563803"/>
-                  </a:lnTo>
-                  <a:lnTo>
-                    <a:pt x="2721655" y="575530"/>
-                  </a:lnTo>
-                  <a:lnTo>
-                    <a:pt x="2793278" y="587103"/>
-                  </a:lnTo>
-                  <a:lnTo>
-                    <a:pt x="2864901" y="598523"/>
-                  </a:lnTo>
-                  <a:lnTo>
-                    <a:pt x="2936523" y="609793"/>
-                  </a:lnTo>
-                  <a:lnTo>
-                    <a:pt x="3008146" y="620915"/>
-                  </a:lnTo>
-                  <a:lnTo>
-                    <a:pt x="3079768" y="631890"/>
-                  </a:lnTo>
-                  <a:lnTo>
-                    <a:pt x="3151391" y="642721"/>
-                  </a:lnTo>
-                  <a:lnTo>
-                    <a:pt x="3223013" y="653409"/>
-                  </a:lnTo>
-                  <a:lnTo>
-                    <a:pt x="3294636" y="663956"/>
-                  </a:lnTo>
-                  <a:lnTo>
-                    <a:pt x="3366258" y="674365"/>
-                  </a:lnTo>
-                  <a:lnTo>
-                    <a:pt x="3437881" y="684636"/>
-                  </a:lnTo>
-                  <a:lnTo>
-                    <a:pt x="3509503" y="694772"/>
-                  </a:lnTo>
-                  <a:lnTo>
-                    <a:pt x="3581126" y="704775"/>
-                  </a:lnTo>
-                  <a:lnTo>
-                    <a:pt x="3652748" y="714646"/>
-                  </a:lnTo>
-                  <a:lnTo>
-                    <a:pt x="3724371" y="724387"/>
-                  </a:lnTo>
-                  <a:lnTo>
-                    <a:pt x="3795993" y="733999"/>
-                  </a:lnTo>
-                  <a:lnTo>
-                    <a:pt x="3867616" y="743486"/>
-                  </a:lnTo>
-                  <a:lnTo>
-                    <a:pt x="3939238" y="752847"/>
-                  </a:lnTo>
-                  <a:lnTo>
-                    <a:pt x="4010861" y="762085"/>
-                  </a:lnTo>
-                  <a:lnTo>
-                    <a:pt x="4082483" y="771201"/>
-                  </a:lnTo>
-                  <a:lnTo>
-                    <a:pt x="4154106" y="780197"/>
-                  </a:lnTo>
-                  <a:lnTo>
-                    <a:pt x="4225729" y="789075"/>
-                  </a:lnTo>
-                  <a:lnTo>
-                    <a:pt x="4297351" y="797835"/>
-                  </a:lnTo>
-                  <a:lnTo>
-                    <a:pt x="4368974" y="806481"/>
-                  </a:lnTo>
-                  <a:lnTo>
-                    <a:pt x="4440596" y="815012"/>
-                  </a:lnTo>
-                  <a:lnTo>
-                    <a:pt x="4512219" y="823432"/>
-                  </a:lnTo>
-                  <a:lnTo>
-                    <a:pt x="4583841" y="831740"/>
-                  </a:lnTo>
-                  <a:lnTo>
-                    <a:pt x="4655464" y="839939"/>
-                  </a:lnTo>
-                  <a:lnTo>
-                    <a:pt x="4727086" y="848030"/>
-                  </a:lnTo>
-                  <a:lnTo>
-                    <a:pt x="4798709" y="856014"/>
-                  </a:lnTo>
-                  <a:lnTo>
-                    <a:pt x="4870331" y="863894"/>
-                  </a:lnTo>
-                  <a:lnTo>
-                    <a:pt x="4941954" y="871669"/>
-                  </a:lnTo>
-                  <a:lnTo>
-                    <a:pt x="5013576" y="879342"/>
-                  </a:lnTo>
-                  <a:lnTo>
-                    <a:pt x="5085199" y="886914"/>
-                  </a:lnTo>
-                  <a:lnTo>
-                    <a:pt x="5156821" y="894387"/>
-                  </a:lnTo>
-                  <a:lnTo>
-                    <a:pt x="5228444" y="901761"/>
-                  </a:lnTo>
-                  <a:lnTo>
-                    <a:pt x="5300066" y="909037"/>
-                  </a:lnTo>
-                  <a:lnTo>
-                    <a:pt x="5371689" y="916218"/>
-                  </a:lnTo>
-                  <a:lnTo>
-                    <a:pt x="5443311" y="923305"/>
-                  </a:lnTo>
-                  <a:lnTo>
-                    <a:pt x="5514934" y="930298"/>
-                  </a:lnTo>
-                  <a:lnTo>
-                    <a:pt x="5586557" y="937199"/>
-                  </a:lnTo>
-                  <a:lnTo>
-                    <a:pt x="5658179" y="944009"/>
-                  </a:lnTo>
-                  <a:lnTo>
-                    <a:pt x="5729802" y="950730"/>
-                  </a:lnTo>
-                  <a:lnTo>
-                    <a:pt x="5801424" y="957362"/>
-                  </a:lnTo>
-                  <a:lnTo>
-                    <a:pt x="5873047" y="963906"/>
-                  </a:lnTo>
-                  <a:lnTo>
-                    <a:pt x="5944669" y="970365"/>
-                  </a:lnTo>
-                  <a:lnTo>
-                    <a:pt x="6016292" y="976738"/>
-                  </a:lnTo>
-                  <a:lnTo>
-                    <a:pt x="6087914" y="983028"/>
-                  </a:lnTo>
-                  <a:lnTo>
-                    <a:pt x="6159537" y="989234"/>
-                  </a:lnTo>
-                  <a:lnTo>
-                    <a:pt x="6231159" y="995359"/>
-                  </a:lnTo>
-                  <a:lnTo>
-                    <a:pt x="6302782" y="1001404"/>
-                  </a:lnTo>
-                  <a:lnTo>
-                    <a:pt x="6374404" y="1007368"/>
-                  </a:lnTo>
-                  <a:lnTo>
-                    <a:pt x="6446027" y="1013255"/>
-                  </a:lnTo>
-                  <a:lnTo>
-                    <a:pt x="6517649" y="1019063"/>
-                  </a:lnTo>
-                  <a:lnTo>
-                    <a:pt x="6589272" y="1024795"/>
-                  </a:lnTo>
-                  <a:lnTo>
-                    <a:pt x="6660894" y="1030452"/>
-                  </a:lnTo>
-                  <a:lnTo>
-                    <a:pt x="6732517" y="1036034"/>
-                  </a:lnTo>
-                  <a:lnTo>
-                    <a:pt x="6804139" y="1041543"/>
-                  </a:lnTo>
-                  <a:lnTo>
-                    <a:pt x="6875762" y="1046979"/>
-                  </a:lnTo>
-                  <a:lnTo>
-                    <a:pt x="6947385" y="1052343"/>
-                  </a:lnTo>
-                  <a:lnTo>
-                    <a:pt x="7019007" y="1057637"/>
-                  </a:lnTo>
-                  <a:lnTo>
-                    <a:pt x="7090630" y="1062861"/>
+                    <a:pt x="71622" y="19387"/>
+                  </a:lnTo>
+                  <a:lnTo>
+                    <a:pt x="143245" y="38518"/>
+                  </a:lnTo>
+                  <a:lnTo>
+                    <a:pt x="214867" y="57394"/>
+                  </a:lnTo>
+                  <a:lnTo>
+                    <a:pt x="286490" y="76021"/>
+                  </a:lnTo>
+                  <a:lnTo>
+                    <a:pt x="358112" y="94399"/>
+                  </a:lnTo>
+                  <a:lnTo>
+                    <a:pt x="429735" y="112534"/>
+                  </a:lnTo>
+                  <a:lnTo>
+                    <a:pt x="501357" y="130429"/>
+                  </a:lnTo>
+                  <a:lnTo>
+                    <a:pt x="572980" y="148085"/>
+                  </a:lnTo>
+                  <a:lnTo>
+                    <a:pt x="644602" y="165508"/>
+                  </a:lnTo>
+                  <a:lnTo>
+                    <a:pt x="716225" y="182699"/>
+                  </a:lnTo>
+                  <a:lnTo>
+                    <a:pt x="787847" y="199662"/>
+                  </a:lnTo>
+                  <a:lnTo>
+                    <a:pt x="859470" y="216400"/>
+                  </a:lnTo>
+                  <a:lnTo>
+                    <a:pt x="931092" y="232916"/>
+                  </a:lnTo>
+                  <a:lnTo>
+                    <a:pt x="1002715" y="249212"/>
+                  </a:lnTo>
+                  <a:lnTo>
+                    <a:pt x="1074337" y="265293"/>
+                  </a:lnTo>
+                  <a:lnTo>
+                    <a:pt x="1145960" y="281160"/>
+                  </a:lnTo>
+                  <a:lnTo>
+                    <a:pt x="1217582" y="296816"/>
+                  </a:lnTo>
+                  <a:lnTo>
+                    <a:pt x="1289205" y="312264"/>
+                  </a:lnTo>
+                  <a:lnTo>
+                    <a:pt x="1360827" y="327508"/>
+                  </a:lnTo>
+                  <a:lnTo>
+                    <a:pt x="1432450" y="342549"/>
+                  </a:lnTo>
+                  <a:lnTo>
+                    <a:pt x="1504073" y="357391"/>
+                  </a:lnTo>
+                  <a:lnTo>
+                    <a:pt x="1575695" y="372035"/>
+                  </a:lnTo>
+                  <a:lnTo>
+                    <a:pt x="1647318" y="386485"/>
+                  </a:lnTo>
+                  <a:lnTo>
+                    <a:pt x="1718940" y="400744"/>
+                  </a:lnTo>
+                  <a:lnTo>
+                    <a:pt x="1790563" y="414813"/>
+                  </a:lnTo>
+                  <a:lnTo>
+                    <a:pt x="1862185" y="428695"/>
+                  </a:lnTo>
+                  <a:lnTo>
+                    <a:pt x="1933808" y="442393"/>
+                  </a:lnTo>
+                  <a:lnTo>
+                    <a:pt x="2005430" y="455910"/>
+                  </a:lnTo>
+                  <a:lnTo>
+                    <a:pt x="2077053" y="469247"/>
+                  </a:lnTo>
+                  <a:lnTo>
+                    <a:pt x="2148675" y="482407"/>
+                  </a:lnTo>
+                  <a:lnTo>
+                    <a:pt x="2220298" y="495392"/>
+                  </a:lnTo>
+                  <a:lnTo>
+                    <a:pt x="2291920" y="508205"/>
+                  </a:lnTo>
+                  <a:lnTo>
+                    <a:pt x="2363543" y="520848"/>
+                  </a:lnTo>
+                  <a:lnTo>
+                    <a:pt x="2435165" y="533323"/>
+                  </a:lnTo>
+                  <a:lnTo>
+                    <a:pt x="2506788" y="545633"/>
+                  </a:lnTo>
+                  <a:lnTo>
+                    <a:pt x="2578410" y="557779"/>
+                  </a:lnTo>
+                  <a:lnTo>
+                    <a:pt x="2650033" y="569764"/>
+                  </a:lnTo>
+                  <a:lnTo>
+                    <a:pt x="2721655" y="581590"/>
+                  </a:lnTo>
+                  <a:lnTo>
+                    <a:pt x="2793278" y="593259"/>
+                  </a:lnTo>
+                  <a:lnTo>
+                    <a:pt x="2864901" y="604773"/>
+                  </a:lnTo>
+                  <a:lnTo>
+                    <a:pt x="2936523" y="616134"/>
+                  </a:lnTo>
+                  <a:lnTo>
+                    <a:pt x="3008146" y="627345"/>
+                  </a:lnTo>
+                  <a:lnTo>
+                    <a:pt x="3079768" y="638406"/>
+                  </a:lnTo>
+                  <a:lnTo>
+                    <a:pt x="3151391" y="649321"/>
+                  </a:lnTo>
+                  <a:lnTo>
+                    <a:pt x="3223013" y="660091"/>
+                  </a:lnTo>
+                  <a:lnTo>
+                    <a:pt x="3294636" y="670718"/>
+                  </a:lnTo>
+                  <a:lnTo>
+                    <a:pt x="3366258" y="681205"/>
+                  </a:lnTo>
+                  <a:lnTo>
+                    <a:pt x="3437881" y="691551"/>
+                  </a:lnTo>
+                  <a:lnTo>
+                    <a:pt x="3509503" y="701761"/>
+                  </a:lnTo>
+                  <a:lnTo>
+                    <a:pt x="3581126" y="711835"/>
+                  </a:lnTo>
+                  <a:lnTo>
+                    <a:pt x="3652748" y="721775"/>
+                  </a:lnTo>
+                  <a:lnTo>
+                    <a:pt x="3724371" y="731584"/>
+                  </a:lnTo>
+                  <a:lnTo>
+                    <a:pt x="3795993" y="741262"/>
+                  </a:lnTo>
+                  <a:lnTo>
+                    <a:pt x="3867616" y="750812"/>
+                  </a:lnTo>
+                  <a:lnTo>
+                    <a:pt x="3939238" y="760235"/>
+                  </a:lnTo>
+                  <a:lnTo>
+                    <a:pt x="4010861" y="769533"/>
+                  </a:lnTo>
+                  <a:lnTo>
+                    <a:pt x="4082483" y="778708"/>
+                  </a:lnTo>
+                  <a:lnTo>
+                    <a:pt x="4154106" y="787760"/>
+                  </a:lnTo>
+                  <a:lnTo>
+                    <a:pt x="4225729" y="796693"/>
+                  </a:lnTo>
+                  <a:lnTo>
+                    <a:pt x="4297351" y="805507"/>
+                  </a:lnTo>
+                  <a:lnTo>
+                    <a:pt x="4368974" y="814204"/>
+                  </a:lnTo>
+                  <a:lnTo>
+                    <a:pt x="4440596" y="822786"/>
+                  </a:lnTo>
+                  <a:lnTo>
+                    <a:pt x="4512219" y="831254"/>
+                  </a:lnTo>
+                  <a:lnTo>
+                    <a:pt x="4583841" y="839609"/>
+                  </a:lnTo>
+                  <a:lnTo>
+                    <a:pt x="4655464" y="847854"/>
+                  </a:lnTo>
+                  <a:lnTo>
+                    <a:pt x="4727086" y="855989"/>
+                  </a:lnTo>
+                  <a:lnTo>
+                    <a:pt x="4798709" y="864016"/>
+                  </a:lnTo>
+                  <a:lnTo>
+                    <a:pt x="4870331" y="871937"/>
+                  </a:lnTo>
+                  <a:lnTo>
+                    <a:pt x="4941954" y="879752"/>
+                  </a:lnTo>
+                  <a:lnTo>
+                    <a:pt x="5013576" y="887464"/>
+                  </a:lnTo>
+                  <a:lnTo>
+                    <a:pt x="5085199" y="895073"/>
+                  </a:lnTo>
+                  <a:lnTo>
+                    <a:pt x="5156821" y="902582"/>
+                  </a:lnTo>
+                  <a:lnTo>
+                    <a:pt x="5228444" y="909990"/>
+                  </a:lnTo>
+                  <a:lnTo>
+                    <a:pt x="5300066" y="917301"/>
+                  </a:lnTo>
+                  <a:lnTo>
+                    <a:pt x="5371689" y="924514"/>
+                  </a:lnTo>
+                  <a:lnTo>
+                    <a:pt x="5443311" y="931632"/>
+                  </a:lnTo>
+                  <a:lnTo>
+                    <a:pt x="5514934" y="938655"/>
+                  </a:lnTo>
+                  <a:lnTo>
+                    <a:pt x="5586557" y="945585"/>
+                  </a:lnTo>
+                  <a:lnTo>
+                    <a:pt x="5658179" y="952423"/>
+                  </a:lnTo>
+                  <a:lnTo>
+                    <a:pt x="5729802" y="959171"/>
+                  </a:lnTo>
+                  <a:lnTo>
+                    <a:pt x="5801424" y="965828"/>
+                  </a:lnTo>
+                  <a:lnTo>
+                    <a:pt x="5873047" y="972398"/>
+                  </a:lnTo>
+                  <a:lnTo>
+                    <a:pt x="5944669" y="978880"/>
+                  </a:lnTo>
+                  <a:lnTo>
+                    <a:pt x="6016292" y="985276"/>
+                  </a:lnTo>
+                  <a:lnTo>
+                    <a:pt x="6087914" y="991587"/>
+                  </a:lnTo>
+                  <a:lnTo>
+                    <a:pt x="6159537" y="997815"/>
+                  </a:lnTo>
+                  <a:lnTo>
+                    <a:pt x="6231159" y="1003959"/>
+                  </a:lnTo>
+                  <a:lnTo>
+                    <a:pt x="6302782" y="1010023"/>
+                  </a:lnTo>
+                  <a:lnTo>
+                    <a:pt x="6374404" y="1016006"/>
+                  </a:lnTo>
+                  <a:lnTo>
+                    <a:pt x="6446027" y="1021909"/>
+                  </a:lnTo>
+                  <a:lnTo>
+                    <a:pt x="6517649" y="1027734"/>
+                  </a:lnTo>
+                  <a:lnTo>
+                    <a:pt x="6589272" y="1033482"/>
+                  </a:lnTo>
+                  <a:lnTo>
+                    <a:pt x="6660894" y="1039153"/>
+                  </a:lnTo>
+                  <a:lnTo>
+                    <a:pt x="6732517" y="1044749"/>
+                  </a:lnTo>
+                  <a:lnTo>
+                    <a:pt x="6804139" y="1050271"/>
+                  </a:lnTo>
+                  <a:lnTo>
+                    <a:pt x="6875762" y="1055720"/>
+                  </a:lnTo>
+                  <a:lnTo>
+                    <a:pt x="6947385" y="1061096"/>
+                  </a:lnTo>
+                  <a:lnTo>
+                    <a:pt x="7019007" y="1066401"/>
+                  </a:lnTo>
+                  <a:lnTo>
+                    <a:pt x="7090630" y="1071636"/>
                   </a:lnTo>
                 </a:path>
               </a:pathLst>
@@ -5371,7 +5371,7 @@
                   <a:latin typeface="Helvetica"/>
                   <a:cs typeface="Helvetica"/>
                 </a:rPr>
-                <a:t>subHR per 10 % decline: 1.18 (1.06-1.31), p_Bonf = 0.020 (n = 6)  |  per IQR decline (Δ = 27.5 %): 1.56 (1.16-2.10)  |  IQR: [-29.1, -1.6] %</a:t>
+                <a:t>subHR per 10 % decline: 1.18 (1.06-1.31), p_Bonf = 0.019 (n = 6)  |  per IQR decline (Δ = 27.5 %): 1.57 (1.16-2.11)  |  IQR: [-29.1, -1.6] %</a:t>
               </a:r>
             </a:p>
           </p:txBody>
